--- a/exhibition/current/presentations/CBSC_ZDC_status_update_20260805.pptx
+++ b/exhibition/current/presentations/CBSC_ZDC_status_update_20260805.pptx
@@ -17,9 +17,14 @@
     <p:sldId id="265" r:id="rId11"/>
     <p:sldId id="266" r:id="rId12"/>
     <p:sldId id="267" r:id="rId13"/>
+    <p:sldId id="268" r:id="rId14"/>
+    <p:sldId id="269" r:id="rId15"/>
+    <p:sldId id="270" r:id="rId16"/>
+    <p:sldId id="271" r:id="rId17"/>
+    <p:sldId id="272" r:id="rId18"/>
   </p:sldIdLst>
   <p:notesMasterIdLst>
-    <p:notesMasterId r:id="rId14"/>
+    <p:notesMasterId r:id="rId19"/>
   </p:notesMasterIdLst>
   <p:sldSz cx="12192000" cy="6858000"/>
   <p:notesSz cx="6858000" cy="12192000"/>
@@ -601,7 +606,7 @@
           <a:p>
             <a:r>
               <a:rPr lang="en-US" dirty="0"/>
-              <a:t/>
+              <a:t>The key point for colleagues: optimization progress and distribution fidelity are decoupled here. A better loss has not bought a less detectable generator.</a:t>
             </a:r>
             <a:endParaRPr lang="en-US" dirty="0"/>
           </a:p>
@@ -689,7 +694,7 @@
           <a:p>
             <a:r>
               <a:rPr lang="en-US" dirty="0"/>
-              <a:t>Do not soften this slide. The honest position is that optimization has moved a long way and fidelity has not been demonstrated.</a:t>
+              <a:t>These are the observables a reconstruction would actually use, so the offsets matter more than the aggregate loss.</a:t>
             </a:r>
             <a:endParaRPr lang="en-US" dirty="0"/>
           </a:p>
@@ -777,7 +782,7 @@
           <a:p>
             <a:r>
               <a:rPr lang="en-US" dirty="0"/>
-              <a:t>If asked what would most likely move fidelity: the pilot bank is 4.3% of the corpus and has never been increased.</a:t>
+              <a:t>Worth pausing on: several observables have the right central value and the wrong spread, which is exactly what a classifier picks up on.</a:t>
             </a:r>
             <a:endParaRPr lang="en-US" dirty="0"/>
           </a:p>
@@ -801,6 +806,446 @@
             <a:fld id="{F7021451-1387-4CA6-816F-3879F97B5CBC}" type="slidenum">
               <a:rPr lang="en-US"/>
               <a:t>12</a:t>
+            </a:fld>
+            <a:endParaRPr lang="en-US"/>
+          </a:p>
+        </p:txBody>
+      </p:sp>
+    </p:spTree>
+    <p:extLst>
+      <p:ext uri="{BB962C8B-B14F-4D97-AF65-F5344CB8AC3E}">
+        <p14:creationId xmlns:p14="http://schemas.microsoft.com/office/powerpoint/2010/main" val="1024086991"/>
+      </p:ext>
+    </p:extLst>
+  </p:cSld>
+  <p:clrMapOvr>
+    <a:masterClrMapping/>
+  </p:clrMapOvr>
+</p:notes>
+</file>
+
+<file path=ppt/notesSlides/notesSlide13.xml><?xml version="1.0" encoding="utf-8"?>
+<p:notes xmlns:a="http://schemas.openxmlformats.org/drawingml/2006/main" xmlns:r="http://schemas.openxmlformats.org/officeDocument/2006/relationships" xmlns:p="http://schemas.openxmlformats.org/presentationml/2006/main">
+  <p:cSld>
+    <p:spTree>
+      <p:nvGrpSpPr>
+        <p:cNvPr id="1" name=""/>
+        <p:cNvGrpSpPr/>
+        <p:nvPr/>
+      </p:nvGrpSpPr>
+      <p:grpSpPr>
+        <a:xfrm>
+          <a:off x="0" y="0"/>
+          <a:ext cx="0" cy="0"/>
+          <a:chOff x="0" y="0"/>
+          <a:chExt cx="0" cy="0"/>
+        </a:xfrm>
+      </p:grpSpPr>
+      <p:sp>
+        <p:nvSpPr>
+          <p:cNvPr id="2" name="Slide Image Placeholder 1"/>
+          <p:cNvSpPr>
+            <a:spLocks noGrp="1" noRot="1" noChangeAspect="1"/>
+          </p:cNvSpPr>
+          <p:nvPr>
+            <p:ph type="sldImg"/>
+          </p:nvPr>
+        </p:nvSpPr>
+        <p:spPr/>
+      </p:sp>
+      <p:sp>
+        <p:nvSpPr>
+          <p:cNvPr id="3" name="Notes Placeholder 2"/>
+          <p:cNvSpPr>
+            <a:spLocks noGrp="1"/>
+          </p:cNvSpPr>
+          <p:nvPr>
+            <p:ph type="body" idx="1"/>
+          </p:nvPr>
+        </p:nvSpPr>
+        <p:spPr/>
+        <p:txBody>
+          <a:bodyPr/>
+          <a:lstStyle/>
+          <a:p>
+            <a:r>
+              <a:rPr lang="en-US" dirty="0"/>
+              <a:t>The layer-0 undershoot is a real, visible, unresolved defect and worth raising explicitly — it is the clearest single structural discrepancy in the model.</a:t>
+            </a:r>
+            <a:endParaRPr lang="en-US" dirty="0"/>
+          </a:p>
+        </p:txBody>
+      </p:sp>
+      <p:sp>
+        <p:nvSpPr>
+          <p:cNvPr id="4" name="Slide Number Placeholder 3"/>
+          <p:cNvSpPr>
+            <a:spLocks noGrp="1"/>
+          </p:cNvSpPr>
+          <p:nvPr>
+            <p:ph type="sldNum" sz="quarter" idx="10"/>
+          </p:nvPr>
+        </p:nvSpPr>
+        <p:spPr/>
+        <p:txBody>
+          <a:bodyPr/>
+          <a:lstStyle/>
+          <a:p>
+            <a:fld id="{F7021451-1387-4CA6-816F-3879F97B5CBC}" type="slidenum">
+              <a:rPr lang="en-US"/>
+              <a:t>13</a:t>
+            </a:fld>
+            <a:endParaRPr lang="en-US"/>
+          </a:p>
+        </p:txBody>
+      </p:sp>
+    </p:spTree>
+    <p:extLst>
+      <p:ext uri="{BB962C8B-B14F-4D97-AF65-F5344CB8AC3E}">
+        <p14:creationId xmlns:p14="http://schemas.microsoft.com/office/powerpoint/2010/main" val="1024086991"/>
+      </p:ext>
+    </p:extLst>
+  </p:cSld>
+  <p:clrMapOvr>
+    <a:masterClrMapping/>
+  </p:clrMapOvr>
+</p:notes>
+</file>
+
+<file path=ppt/notesSlides/notesSlide14.xml><?xml version="1.0" encoding="utf-8"?>
+<p:notes xmlns:a="http://schemas.openxmlformats.org/drawingml/2006/main" xmlns:r="http://schemas.openxmlformats.org/officeDocument/2006/relationships" xmlns:p="http://schemas.openxmlformats.org/presentationml/2006/main">
+  <p:cSld>
+    <p:spTree>
+      <p:nvGrpSpPr>
+        <p:cNvPr id="1" name=""/>
+        <p:cNvGrpSpPr/>
+        <p:nvPr/>
+      </p:nvGrpSpPr>
+      <p:grpSpPr>
+        <a:xfrm>
+          <a:off x="0" y="0"/>
+          <a:ext cx="0" cy="0"/>
+          <a:chOff x="0" y="0"/>
+          <a:chExt cx="0" cy="0"/>
+        </a:xfrm>
+      </p:grpSpPr>
+      <p:sp>
+        <p:nvSpPr>
+          <p:cNvPr id="2" name="Slide Image Placeholder 1"/>
+          <p:cNvSpPr>
+            <a:spLocks noGrp="1" noRot="1" noChangeAspect="1"/>
+          </p:cNvSpPr>
+          <p:nvPr>
+            <p:ph type="sldImg"/>
+          </p:nvPr>
+        </p:nvSpPr>
+        <p:spPr/>
+      </p:sp>
+      <p:sp>
+        <p:nvSpPr>
+          <p:cNvPr id="3" name="Notes Placeholder 2"/>
+          <p:cNvSpPr>
+            <a:spLocks noGrp="1"/>
+          </p:cNvSpPr>
+          <p:nvPr>
+            <p:ph type="body" idx="1"/>
+          </p:nvPr>
+        </p:nvSpPr>
+        <p:spPr/>
+        <p:txBody>
+          <a:bodyPr/>
+          <a:lstStyle/>
+          <a:p>
+            <a:r>
+              <a:rPr lang="en-US" dirty="0"/>
+              <a:t>Useful for intuition. The Geant4 panel is visibly denser and brighter in the core than any of the five draws.</a:t>
+            </a:r>
+            <a:endParaRPr lang="en-US" dirty="0"/>
+          </a:p>
+        </p:txBody>
+      </p:sp>
+      <p:sp>
+        <p:nvSpPr>
+          <p:cNvPr id="4" name="Slide Number Placeholder 3"/>
+          <p:cNvSpPr>
+            <a:spLocks noGrp="1"/>
+          </p:cNvSpPr>
+          <p:nvPr>
+            <p:ph type="sldNum" sz="quarter" idx="10"/>
+          </p:nvPr>
+        </p:nvSpPr>
+        <p:spPr/>
+        <p:txBody>
+          <a:bodyPr/>
+          <a:lstStyle/>
+          <a:p>
+            <a:fld id="{F7021451-1387-4CA6-816F-3879F97B5CBC}" type="slidenum">
+              <a:rPr lang="en-US"/>
+              <a:t>14</a:t>
+            </a:fld>
+            <a:endParaRPr lang="en-US"/>
+          </a:p>
+        </p:txBody>
+      </p:sp>
+    </p:spTree>
+    <p:extLst>
+      <p:ext uri="{BB962C8B-B14F-4D97-AF65-F5344CB8AC3E}">
+        <p14:creationId xmlns:p14="http://schemas.microsoft.com/office/powerpoint/2010/main" val="1024086991"/>
+      </p:ext>
+    </p:extLst>
+  </p:cSld>
+  <p:clrMapOvr>
+    <a:masterClrMapping/>
+  </p:clrMapOvr>
+</p:notes>
+</file>
+
+<file path=ppt/notesSlides/notesSlide15.xml><?xml version="1.0" encoding="utf-8"?>
+<p:notes xmlns:a="http://schemas.openxmlformats.org/drawingml/2006/main" xmlns:r="http://schemas.openxmlformats.org/officeDocument/2006/relationships" xmlns:p="http://schemas.openxmlformats.org/presentationml/2006/main">
+  <p:cSld>
+    <p:spTree>
+      <p:nvGrpSpPr>
+        <p:cNvPr id="1" name=""/>
+        <p:cNvGrpSpPr/>
+        <p:nvPr/>
+      </p:nvGrpSpPr>
+      <p:grpSpPr>
+        <a:xfrm>
+          <a:off x="0" y="0"/>
+          <a:ext cx="0" cy="0"/>
+          <a:chOff x="0" y="0"/>
+          <a:chExt cx="0" cy="0"/>
+        </a:xfrm>
+      </p:grpSpPr>
+      <p:sp>
+        <p:nvSpPr>
+          <p:cNvPr id="2" name="Slide Image Placeholder 1"/>
+          <p:cNvSpPr>
+            <a:spLocks noGrp="1" noRot="1" noChangeAspect="1"/>
+          </p:cNvSpPr>
+          <p:nvPr>
+            <p:ph type="sldImg"/>
+          </p:nvPr>
+        </p:nvSpPr>
+        <p:spPr/>
+      </p:sp>
+      <p:sp>
+        <p:nvSpPr>
+          <p:cNvPr id="3" name="Notes Placeholder 2"/>
+          <p:cNvSpPr>
+            <a:spLocks noGrp="1"/>
+          </p:cNvSpPr>
+          <p:nvPr>
+            <p:ph type="body" idx="1"/>
+          </p:nvPr>
+        </p:nvSpPr>
+        <p:spPr/>
+        <p:txBody>
+          <a:bodyPr/>
+          <a:lstStyle/>
+          <a:p>
+            <a:r>
+              <a:rPr lang="en-US" dirty="0"/>
+              <a:t/>
+            </a:r>
+            <a:endParaRPr lang="en-US" dirty="0"/>
+          </a:p>
+        </p:txBody>
+      </p:sp>
+      <p:sp>
+        <p:nvSpPr>
+          <p:cNvPr id="4" name="Slide Number Placeholder 3"/>
+          <p:cNvSpPr>
+            <a:spLocks noGrp="1"/>
+          </p:cNvSpPr>
+          <p:nvPr>
+            <p:ph type="sldNum" sz="quarter" idx="10"/>
+          </p:nvPr>
+        </p:nvSpPr>
+        <p:spPr/>
+        <p:txBody>
+          <a:bodyPr/>
+          <a:lstStyle/>
+          <a:p>
+            <a:fld id="{F7021451-1387-4CA6-816F-3879F97B5CBC}" type="slidenum">
+              <a:rPr lang="en-US"/>
+              <a:t>15</a:t>
+            </a:fld>
+            <a:endParaRPr lang="en-US"/>
+          </a:p>
+        </p:txBody>
+      </p:sp>
+    </p:spTree>
+    <p:extLst>
+      <p:ext uri="{BB962C8B-B14F-4D97-AF65-F5344CB8AC3E}">
+        <p14:creationId xmlns:p14="http://schemas.microsoft.com/office/powerpoint/2010/main" val="1024086991"/>
+      </p:ext>
+    </p:extLst>
+  </p:cSld>
+  <p:clrMapOvr>
+    <a:masterClrMapping/>
+  </p:clrMapOvr>
+</p:notes>
+</file>
+
+<file path=ppt/notesSlides/notesSlide16.xml><?xml version="1.0" encoding="utf-8"?>
+<p:notes xmlns:a="http://schemas.openxmlformats.org/drawingml/2006/main" xmlns:r="http://schemas.openxmlformats.org/officeDocument/2006/relationships" xmlns:p="http://schemas.openxmlformats.org/presentationml/2006/main">
+  <p:cSld>
+    <p:spTree>
+      <p:nvGrpSpPr>
+        <p:cNvPr id="1" name=""/>
+        <p:cNvGrpSpPr/>
+        <p:nvPr/>
+      </p:nvGrpSpPr>
+      <p:grpSpPr>
+        <a:xfrm>
+          <a:off x="0" y="0"/>
+          <a:ext cx="0" cy="0"/>
+          <a:chOff x="0" y="0"/>
+          <a:chExt cx="0" cy="0"/>
+        </a:xfrm>
+      </p:grpSpPr>
+      <p:sp>
+        <p:nvSpPr>
+          <p:cNvPr id="2" name="Slide Image Placeholder 1"/>
+          <p:cNvSpPr>
+            <a:spLocks noGrp="1" noRot="1" noChangeAspect="1"/>
+          </p:cNvSpPr>
+          <p:nvPr>
+            <p:ph type="sldImg"/>
+          </p:nvPr>
+        </p:nvSpPr>
+        <p:spPr/>
+      </p:sp>
+      <p:sp>
+        <p:nvSpPr>
+          <p:cNvPr id="3" name="Notes Placeholder 2"/>
+          <p:cNvSpPr>
+            <a:spLocks noGrp="1"/>
+          </p:cNvSpPr>
+          <p:nvPr>
+            <p:ph type="body" idx="1"/>
+          </p:nvPr>
+        </p:nvSpPr>
+        <p:spPr/>
+        <p:txBody>
+          <a:bodyPr/>
+          <a:lstStyle/>
+          <a:p>
+            <a:r>
+              <a:rPr lang="en-US" dirty="0"/>
+              <a:t>Do not soften this slide. The honest position is that optimization has moved a long way and fidelity has not been demonstrated.</a:t>
+            </a:r>
+            <a:endParaRPr lang="en-US" dirty="0"/>
+          </a:p>
+        </p:txBody>
+      </p:sp>
+      <p:sp>
+        <p:nvSpPr>
+          <p:cNvPr id="4" name="Slide Number Placeholder 3"/>
+          <p:cNvSpPr>
+            <a:spLocks noGrp="1"/>
+          </p:cNvSpPr>
+          <p:nvPr>
+            <p:ph type="sldNum" sz="quarter" idx="10"/>
+          </p:nvPr>
+        </p:nvSpPr>
+        <p:spPr/>
+        <p:txBody>
+          <a:bodyPr/>
+          <a:lstStyle/>
+          <a:p>
+            <a:fld id="{F7021451-1387-4CA6-816F-3879F97B5CBC}" type="slidenum">
+              <a:rPr lang="en-US"/>
+              <a:t>16</a:t>
+            </a:fld>
+            <a:endParaRPr lang="en-US"/>
+          </a:p>
+        </p:txBody>
+      </p:sp>
+    </p:spTree>
+    <p:extLst>
+      <p:ext uri="{BB962C8B-B14F-4D97-AF65-F5344CB8AC3E}">
+        <p14:creationId xmlns:p14="http://schemas.microsoft.com/office/powerpoint/2010/main" val="1024086991"/>
+      </p:ext>
+    </p:extLst>
+  </p:cSld>
+  <p:clrMapOvr>
+    <a:masterClrMapping/>
+  </p:clrMapOvr>
+</p:notes>
+</file>
+
+<file path=ppt/notesSlides/notesSlide17.xml><?xml version="1.0" encoding="utf-8"?>
+<p:notes xmlns:a="http://schemas.openxmlformats.org/drawingml/2006/main" xmlns:r="http://schemas.openxmlformats.org/officeDocument/2006/relationships" xmlns:p="http://schemas.openxmlformats.org/presentationml/2006/main">
+  <p:cSld>
+    <p:spTree>
+      <p:nvGrpSpPr>
+        <p:cNvPr id="1" name=""/>
+        <p:cNvGrpSpPr/>
+        <p:nvPr/>
+      </p:nvGrpSpPr>
+      <p:grpSpPr>
+        <a:xfrm>
+          <a:off x="0" y="0"/>
+          <a:ext cx="0" cy="0"/>
+          <a:chOff x="0" y="0"/>
+          <a:chExt cx="0" cy="0"/>
+        </a:xfrm>
+      </p:grpSpPr>
+      <p:sp>
+        <p:nvSpPr>
+          <p:cNvPr id="2" name="Slide Image Placeholder 1"/>
+          <p:cNvSpPr>
+            <a:spLocks noGrp="1" noRot="1" noChangeAspect="1"/>
+          </p:cNvSpPr>
+          <p:nvPr>
+            <p:ph type="sldImg"/>
+          </p:nvPr>
+        </p:nvSpPr>
+        <p:spPr/>
+      </p:sp>
+      <p:sp>
+        <p:nvSpPr>
+          <p:cNvPr id="3" name="Notes Placeholder 2"/>
+          <p:cNvSpPr>
+            <a:spLocks noGrp="1"/>
+          </p:cNvSpPr>
+          <p:nvPr>
+            <p:ph type="body" idx="1"/>
+          </p:nvPr>
+        </p:nvSpPr>
+        <p:spPr/>
+        <p:txBody>
+          <a:bodyPr/>
+          <a:lstStyle/>
+          <a:p>
+            <a:r>
+              <a:rPr lang="en-US" dirty="0"/>
+              <a:t>If asked what would most likely move fidelity: the pilot bank is 4.3% of the corpus and has never been increased.</a:t>
+            </a:r>
+            <a:endParaRPr lang="en-US" dirty="0"/>
+          </a:p>
+        </p:txBody>
+      </p:sp>
+      <p:sp>
+        <p:nvSpPr>
+          <p:cNvPr id="4" name="Slide Number Placeholder 3"/>
+          <p:cNvSpPr>
+            <a:spLocks noGrp="1"/>
+          </p:cNvSpPr>
+          <p:nvPr>
+            <p:ph type="sldNum" sz="quarter" idx="10"/>
+          </p:nvPr>
+        </p:nvSpPr>
+        <p:spPr/>
+        <p:txBody>
+          <a:bodyPr/>
+          <a:lstStyle/>
+          <a:p>
+            <a:fld id="{F7021451-1387-4CA6-816F-3879F97B5CBC}" type="slidenum">
+              <a:rPr lang="en-US"/>
+              <a:t>17</a:t>
             </a:fld>
             <a:endParaRPr lang="en-US"/>
           </a:p>
@@ -1305,7 +1750,7 @@
           <a:p>
             <a:r>
               <a:rPr lang="en-US" dirty="0"/>
-              <a:t>The condition-only control at exactly 0.5 with p = 1.0 is the important sanity check. Also note the high-level GBM beats the low-level hybrid here, which says the remaining discrepancy lives in summary shower observables, not in fine per-cell structure.</a:t>
+              <a:t>This is a structured, energy-localised defect rather than global noise, and it is not being fixed by further optimization.</a:t>
             </a:r>
             <a:endParaRPr lang="en-US" dirty="0"/>
           </a:p>
@@ -1393,7 +1838,7 @@
           <a:p>
             <a:r>
               <a:rPr lang="en-US" dirty="0"/>
-              <a:t>The layer-0 undershoot is a real, visible, unresolved defect and worth raising explicitly — it is the clearest single structural discrepancy in the model.</a:t>
+              <a:t>The condition-only control at exactly 0.5 with p = 1.0 is the important sanity check. Also note the high-level GBM beats the low-level hybrid here, which says the remaining discrepancy lives in summary shower observables, not in fine per-cell structure.</a:t>
             </a:r>
             <a:endParaRPr lang="en-US" dirty="0"/>
           </a:p>
@@ -1481,7 +1926,7 @@
           <a:p>
             <a:r>
               <a:rPr lang="en-US" dirty="0"/>
-              <a:t>Useful for intuition. The Geant4 panel is visibly denser and brighter in the core than any of the five draws.</a:t>
+              <a:t>There is no energy window in which the generator becomes hard to distinguish. The discrepancy is present across the whole claim domain.</a:t>
             </a:r>
             <a:endParaRPr lang="en-US" dirty="0"/>
           </a:p>
@@ -2213,7 +2658,7 @@
                 <a:ea typeface="Cambria" pitchFamily="34" charset="-122"/>
                 <a:cs typeface="Cambria" pitchFamily="34" charset="-120"/>
               </a:rPr>
-              <a:t>Fixed-condition validation distributions</a:t>
+              <a:t>Distribution metrics across 25 consecutive epochs</a:t>
             </a:r>
             <a:endParaRPr lang="en-US" sz="3000" dirty="0"/>
           </a:p>
@@ -2252,7 +2697,7 @@
                 <a:ea typeface="Calibri" pitchFamily="34" charset="-122"/>
                 <a:cs typeface="Calibri" pitchFamily="34" charset="-120"/>
               </a:rPr>
-              <a:t>50 Geant4 events against 250 conditional Fast-MC draws, best family, epoch 22.</a:t>
+              <a:t>4,000 fixed validation events per epoch. Dotted red are predeclared thresholds.</a:t>
             </a:r>
             <a:endParaRPr lang="en-US" sz="1300" dirty="0"/>
           </a:p>
@@ -2260,7 +2705,7 @@
       </p:sp>
       <p:pic>
         <p:nvPicPr>
-          <p:cNvPr id="6" name="Image 0" descr="C:\Users\Julia\Desktop\coding\ASIoP\Fast MC CBSC\exhibition\current\model\11_best_model_sample_distributions.png">    </p:cNvPr>
+          <p:cNvPr id="6" name="Image 0" descr="C:\Users\Julia\Desktop\coding\ASIoP\Fast MC CBSC\exhibition\current\diagnostics\headline_vs_epoch.png">    </p:cNvPr>
           <p:cNvPicPr>
             <a:picLocks noChangeAspect="1"/>
           </p:cNvPicPr>
@@ -2274,8 +2719,8 @@
         </p:blipFill>
         <p:spPr>
           <a:xfrm>
-            <a:off x="2072851" y="1243584"/>
-            <a:ext cx="8052393" cy="4800600"/>
+            <a:off x="2034091" y="1225296"/>
+            <a:ext cx="8184778" cy="4297680"/>
           </a:xfrm>
           <a:prstGeom prst="rect">
             <a:avLst/>
@@ -2290,8 +2735,8 @@
         </p:nvSpPr>
         <p:spPr>
           <a:xfrm>
-            <a:off x="502920" y="6355080"/>
-            <a:ext cx="11155680" cy="292608"/>
+            <a:off x="822960" y="5623560"/>
+            <a:ext cx="10607040" cy="658368"/>
           </a:xfrm>
           <a:prstGeom prst="rect">
             <a:avLst/>
@@ -2307,17 +2752,17 @@
               <a:buNone/>
             </a:pPr>
             <a:r>
-              <a:rPr lang="en-US" sz="1000" i="1" dirty="0">
-                <a:solidFill>
-                  <a:srgbClr val="6B7A90"/>
-                </a:solidFill>
-                <a:latin typeface="Calibri" pitchFamily="34" charset="0"/>
-                <a:ea typeface="Calibri" pitchFamily="34" charset="-122"/>
-                <a:cs typeface="Calibri" pitchFamily="34" charset="-120"/>
-              </a:rPr>
-              <a:t>Total response and radial RMS track well; positive-cell count and depth centroid show the largest residual disagreement.</a:t>
-            </a:r>
-            <a:endParaRPr lang="en-US" sz="1000" dirty="0"/>
+              <a:rPr lang="en-US" sz="1250" dirty="0">
+                <a:solidFill>
+                  <a:srgbClr val="2E4A6B"/>
+                </a:solidFill>
+                <a:latin typeface="Calibri" pitchFamily="34" charset="0"/>
+                <a:ea typeface="Calibri" pitchFamily="34" charset="-122"/>
+                <a:cs typeface="Calibri" pitchFamily="34" charset="-120"/>
+              </a:rPr>
+              <a:t>Top left is the whole fidelity story: AUROC moves between 0.77 and 0.92 over 25 epochs and never approaches the 0.65 gate, while the validation loss improves steadily. Bottom centre: Fast-MC emits roughly twice as many zero-response events as Geant4 throughout.</a:t>
+            </a:r>
+            <a:endParaRPr lang="en-US" sz="1250" dirty="0"/>
           </a:p>
         </p:txBody>
       </p:sp>
@@ -2332,6 +2777,1334 @@
 <file path=ppt/slides/slide11.xml><?xml version="1.0" encoding="utf-8"?>
 <p:sld xmlns:a="http://schemas.openxmlformats.org/drawingml/2006/main" xmlns:r="http://schemas.openxmlformats.org/officeDocument/2006/relationships" xmlns:p="http://schemas.openxmlformats.org/presentationml/2006/main">
   <p:cSld name="Slide 11">
+    <p:bg>
+      <p:bgPr>
+        <a:solidFill>
+          <a:srgbClr val="FFFFFF"/>
+        </a:solidFill>
+      </p:bgPr>
+    </p:bg>
+    <p:spTree>
+      <p:nvGrpSpPr>
+        <p:cNvPr id="1" name=""/>
+        <p:cNvGrpSpPr/>
+        <p:nvPr/>
+      </p:nvGrpSpPr>
+      <p:grpSpPr>
+        <a:xfrm>
+          <a:off x="0" y="0"/>
+          <a:ext cx="0" cy="0"/>
+          <a:chOff x="0" y="0"/>
+          <a:chExt cx="0" cy="0"/>
+        </a:xfrm>
+      </p:grpSpPr>
+      <p:sp>
+        <p:nvSpPr>
+          <p:cNvPr id="2" name="Shape 0"/>
+          <p:cNvSpPr/>
+          <p:nvPr/>
+        </p:nvSpPr>
+        <p:spPr>
+          <a:xfrm>
+            <a:off x="502920" y="384048"/>
+            <a:ext cx="420624" cy="420624"/>
+          </a:xfrm>
+          <a:prstGeom prst="ellipse">
+            <a:avLst/>
+          </a:prstGeom>
+          <a:solidFill>
+            <a:srgbClr val="9B4F9B"/>
+          </a:solidFill>
+          <a:ln/>
+        </p:spPr>
+      </p:sp>
+      <p:sp>
+        <p:nvSpPr>
+          <p:cNvPr id="3" name="Text 1"/>
+          <p:cNvSpPr/>
+          <p:nvPr/>
+        </p:nvSpPr>
+        <p:spPr>
+          <a:xfrm>
+            <a:off x="502920" y="384048"/>
+            <a:ext cx="420624" cy="420624"/>
+          </a:xfrm>
+          <a:prstGeom prst="rect">
+            <a:avLst/>
+          </a:prstGeom>
+          <a:noFill/>
+          <a:ln/>
+        </p:spPr>
+        <p:txBody>
+          <a:bodyPr wrap="square" lIns="0" tIns="0" rIns="0" bIns="0" rtlCol="0" anchor="ctr"/>
+          <a:lstStyle/>
+          <a:p>
+            <a:pPr algn="ctr" indent="0" marL="0">
+              <a:buNone/>
+            </a:pPr>
+            <a:r>
+              <a:rPr lang="en-US" sz="1600" b="1" dirty="0">
+                <a:solidFill>
+                  <a:srgbClr val="FFFFFF"/>
+                </a:solidFill>
+                <a:latin typeface="Calibri" pitchFamily="34" charset="0"/>
+                <a:ea typeface="Calibri" pitchFamily="34" charset="-122"/>
+                <a:cs typeface="Calibri" pitchFamily="34" charset="-120"/>
+              </a:rPr>
+              <a:t>10</a:t>
+            </a:r>
+            <a:endParaRPr lang="en-US" sz="1600" dirty="0"/>
+          </a:p>
+        </p:txBody>
+      </p:sp>
+      <p:sp>
+        <p:nvSpPr>
+          <p:cNvPr id="4" name="Text 2"/>
+          <p:cNvSpPr/>
+          <p:nvPr/>
+        </p:nvSpPr>
+        <p:spPr>
+          <a:xfrm>
+            <a:off x="1078992" y="329184"/>
+            <a:ext cx="10607040" cy="475488"/>
+          </a:xfrm>
+          <a:prstGeom prst="rect">
+            <a:avLst/>
+          </a:prstGeom>
+          <a:noFill/>
+          <a:ln/>
+        </p:spPr>
+        <p:txBody>
+          <a:bodyPr wrap="square" lIns="0" tIns="0" rIns="0" bIns="0" rtlCol="0" anchor="ctr"/>
+          <a:lstStyle/>
+          <a:p>
+            <a:pPr indent="0" marL="0">
+              <a:buNone/>
+            </a:pPr>
+            <a:r>
+              <a:rPr lang="en-US" sz="3000" b="1" dirty="0">
+                <a:solidFill>
+                  <a:srgbClr val="16233A"/>
+                </a:solidFill>
+                <a:latin typeface="Cambria" pitchFamily="34" charset="0"/>
+                <a:ea typeface="Cambria" pitchFamily="34" charset="-122"/>
+                <a:cs typeface="Cambria" pitchFamily="34" charset="-120"/>
+              </a:rPr>
+              <a:t>Nine shower observables: means against Geant4, every epoch</a:t>
+            </a:r>
+            <a:endParaRPr lang="en-US" sz="3000" dirty="0"/>
+          </a:p>
+        </p:txBody>
+      </p:sp>
+      <p:sp>
+        <p:nvSpPr>
+          <p:cNvPr id="5" name="Text 3"/>
+          <p:cNvSpPr/>
+          <p:nvPr/>
+        </p:nvSpPr>
+        <p:spPr>
+          <a:xfrm>
+            <a:off x="1078992" y="822960"/>
+            <a:ext cx="10607040" cy="310896"/>
+          </a:xfrm>
+          <a:prstGeom prst="rect">
+            <a:avLst/>
+          </a:prstGeom>
+          <a:noFill/>
+          <a:ln/>
+        </p:spPr>
+        <p:txBody>
+          <a:bodyPr wrap="square" lIns="0" tIns="0" rIns="0" bIns="0" rtlCol="0" anchor="ctr"/>
+          <a:lstStyle/>
+          <a:p>
+            <a:pPr indent="0" marL="0">
+              <a:buNone/>
+            </a:pPr>
+            <a:r>
+              <a:rPr lang="en-US" sz="1300" dirty="0">
+                <a:solidFill>
+                  <a:srgbClr val="6B7A90"/>
+                </a:solidFill>
+                <a:latin typeface="Calibri" pitchFamily="34" charset="0"/>
+                <a:ea typeface="Calibri" pitchFamily="34" charset="-122"/>
+                <a:cs typeface="Calibri" pitchFamily="34" charset="-120"/>
+              </a:rPr>
+              <a:t>Green is the Geant4 mean on the same fixed validation events; orange is Fast-MC.</a:t>
+            </a:r>
+            <a:endParaRPr lang="en-US" sz="1300" dirty="0"/>
+          </a:p>
+        </p:txBody>
+      </p:sp>
+      <p:pic>
+        <p:nvPicPr>
+          <p:cNvPr id="6" name="Image 0" descr="C:\Users\Julia\Desktop\coding\ASIoP\Fast MC CBSC\exhibition\current\diagnostics\feature_moments_vs_epoch.png">    </p:cNvPr>
+          <p:cNvPicPr>
+            <a:picLocks noChangeAspect="1"/>
+          </p:cNvPicPr>
+          <p:nvPr/>
+        </p:nvPicPr>
+        <p:blipFill>
+          <a:blip r:embed="rId1"/>
+          <a:stretch>
+            <a:fillRect/>
+          </a:stretch>
+        </p:blipFill>
+        <p:spPr>
+          <a:xfrm>
+            <a:off x="790448" y="1170432"/>
+            <a:ext cx="7197343" cy="5074920"/>
+          </a:xfrm>
+          <a:prstGeom prst="rect">
+            <a:avLst/>
+          </a:prstGeom>
+        </p:spPr>
+      </p:pic>
+      <p:sp>
+        <p:nvSpPr>
+          <p:cNvPr id="7" name="Text 4"/>
+          <p:cNvSpPr/>
+          <p:nvPr/>
+        </p:nvSpPr>
+        <p:spPr>
+          <a:xfrm>
+            <a:off x="8503920" y="1554480"/>
+            <a:ext cx="3291840" cy="4480560"/>
+          </a:xfrm>
+          <a:prstGeom prst="rect">
+            <a:avLst/>
+          </a:prstGeom>
+          <a:noFill/>
+          <a:ln/>
+        </p:spPr>
+        <p:txBody>
+          <a:bodyPr wrap="square" lIns="0" tIns="0" rIns="0" bIns="0" rtlCol="0" anchor="ctr"/>
+          <a:lstStyle/>
+          <a:p>
+            <a:pPr indent="0" marL="0">
+              <a:buNone/>
+            </a:pPr>
+            <a:r>
+              <a:rPr lang="en-US" sz="1250" b="1" dirty="0">
+                <a:solidFill>
+                  <a:srgbClr val="2E4A6B"/>
+                </a:solidFill>
+                <a:latin typeface="Calibri" pitchFamily="34" charset="0"/>
+                <a:ea typeface="Calibri" pitchFamily="34" charset="-122"/>
+                <a:cs typeface="Calibri" pitchFamily="34" charset="-120"/>
+              </a:rPr>
+              <a:t>Systematic offsets, not noise.
+</a:t>
+            </a:r>
+            <a:pPr indent="0" marL="0">
+              <a:buNone/>
+            </a:pPr>
+            <a:r>
+              <a:rPr lang="en-US" sz="1250" dirty="0">
+                <a:solidFill>
+                  <a:srgbClr val="2E4A6B"/>
+                </a:solidFill>
+                <a:latin typeface="Calibri" pitchFamily="34" charset="0"/>
+                <a:ea typeface="Calibri" pitchFamily="34" charset="-122"/>
+                <a:cs typeface="Calibri" pitchFamily="34" charset="-120"/>
+              </a:rPr>
+              <a:t>Total response runs about 14% high.</a:t>
+            </a:r>
+            <a:endParaRPr lang="en-US" sz="1250" dirty="0"/>
+          </a:p>
+          <a:p>
+            <a:pPr indent="0" marL="0">
+              <a:buNone/>
+            </a:pPr>
+            <a:endParaRPr lang="en-US" sz="1250" dirty="0"/>
+          </a:p>
+          <a:p>
+            <a:pPr indent="0" marL="0">
+              <a:buNone/>
+            </a:pPr>
+            <a:r>
+              <a:rPr lang="en-US" sz="1250" dirty="0">
+                <a:solidFill>
+                  <a:srgbClr val="2E4A6B"/>
+                </a:solidFill>
+                <a:latin typeface="Calibri" pitchFamily="34" charset="0"/>
+                <a:ea typeface="Calibri" pitchFamily="34" charset="-122"/>
+                <a:cs typeface="Calibri" pitchFamily="34" charset="-120"/>
+              </a:rPr>
+              <a:t>Radial RMS is consistently too wide.</a:t>
+            </a:r>
+            <a:endParaRPr lang="en-US" sz="1250" dirty="0"/>
+          </a:p>
+          <a:p>
+            <a:pPr indent="0" marL="0">
+              <a:buNone/>
+            </a:pPr>
+            <a:endParaRPr lang="en-US" sz="1250" dirty="0"/>
+          </a:p>
+          <a:p>
+            <a:pPr indent="0" marL="0">
+              <a:buNone/>
+            </a:pPr>
+            <a:r>
+              <a:rPr lang="en-US" sz="1250" dirty="0">
+                <a:solidFill>
+                  <a:srgbClr val="2E4A6B"/>
+                </a:solidFill>
+                <a:latin typeface="Calibri" pitchFamily="34" charset="0"/>
+                <a:ea typeface="Calibri" pitchFamily="34" charset="-122"/>
+                <a:cs typeface="Calibri" pitchFamily="34" charset="-120"/>
+              </a:rPr>
+              <a:t>Leading-cell fraction is too low and ECAL fraction too high.</a:t>
+            </a:r>
+            <a:endParaRPr lang="en-US" sz="1250" dirty="0"/>
+          </a:p>
+          <a:p>
+            <a:pPr indent="0" marL="0">
+              <a:buNone/>
+            </a:pPr>
+            <a:endParaRPr lang="en-US" sz="1250" dirty="0"/>
+          </a:p>
+          <a:p>
+            <a:pPr indent="0" marL="0">
+              <a:buNone/>
+            </a:pPr>
+            <a:r>
+              <a:rPr lang="en-US" sz="1250" dirty="0">
+                <a:solidFill>
+                  <a:srgbClr val="2E4A6B"/>
+                </a:solidFill>
+                <a:latin typeface="Calibri" pitchFamily="34" charset="0"/>
+                <a:ea typeface="Calibri" pitchFamily="34" charset="-122"/>
+                <a:cs typeface="Calibri" pitchFamily="34" charset="-120"/>
+              </a:rPr>
+              <a:t>Hit count and the two transverse centroids sit close to Geant4.</a:t>
+            </a:r>
+            <a:endParaRPr lang="en-US" sz="1250" dirty="0"/>
+          </a:p>
+        </p:txBody>
+      </p:sp>
+    </p:spTree>
+  </p:cSld>
+  <p:clrMapOvr>
+    <a:masterClrMapping/>
+  </p:clrMapOvr>
+</p:sld>
+</file>
+
+<file path=ppt/slides/slide12.xml><?xml version="1.0" encoding="utf-8"?>
+<p:sld xmlns:a="http://schemas.openxmlformats.org/drawingml/2006/main" xmlns:r="http://schemas.openxmlformats.org/officeDocument/2006/relationships" xmlns:p="http://schemas.openxmlformats.org/presentationml/2006/main">
+  <p:cSld name="Slide 12">
+    <p:bg>
+      <p:bgPr>
+        <a:solidFill>
+          <a:srgbClr val="FFFFFF"/>
+        </a:solidFill>
+      </p:bgPr>
+    </p:bg>
+    <p:spTree>
+      <p:nvGrpSpPr>
+        <p:cNvPr id="1" name=""/>
+        <p:cNvGrpSpPr/>
+        <p:nvPr/>
+      </p:nvGrpSpPr>
+      <p:grpSpPr>
+        <a:xfrm>
+          <a:off x="0" y="0"/>
+          <a:ext cx="0" cy="0"/>
+          <a:chOff x="0" y="0"/>
+          <a:chExt cx="0" cy="0"/>
+        </a:xfrm>
+      </p:grpSpPr>
+      <p:sp>
+        <p:nvSpPr>
+          <p:cNvPr id="2" name="Shape 0"/>
+          <p:cNvSpPr/>
+          <p:nvPr/>
+        </p:nvSpPr>
+        <p:spPr>
+          <a:xfrm>
+            <a:off x="502920" y="384048"/>
+            <a:ext cx="420624" cy="420624"/>
+          </a:xfrm>
+          <a:prstGeom prst="ellipse">
+            <a:avLst/>
+          </a:prstGeom>
+          <a:solidFill>
+            <a:srgbClr val="9B4F9B"/>
+          </a:solidFill>
+          <a:ln/>
+        </p:spPr>
+      </p:sp>
+      <p:sp>
+        <p:nvSpPr>
+          <p:cNvPr id="3" name="Text 1"/>
+          <p:cNvSpPr/>
+          <p:nvPr/>
+        </p:nvSpPr>
+        <p:spPr>
+          <a:xfrm>
+            <a:off x="502920" y="384048"/>
+            <a:ext cx="420624" cy="420624"/>
+          </a:xfrm>
+          <a:prstGeom prst="rect">
+            <a:avLst/>
+          </a:prstGeom>
+          <a:noFill/>
+          <a:ln/>
+        </p:spPr>
+        <p:txBody>
+          <a:bodyPr wrap="square" lIns="0" tIns="0" rIns="0" bIns="0" rtlCol="0" anchor="ctr"/>
+          <a:lstStyle/>
+          <a:p>
+            <a:pPr algn="ctr" indent="0" marL="0">
+              <a:buNone/>
+            </a:pPr>
+            <a:r>
+              <a:rPr lang="en-US" sz="1600" b="1" dirty="0">
+                <a:solidFill>
+                  <a:srgbClr val="FFFFFF"/>
+                </a:solidFill>
+                <a:latin typeface="Calibri" pitchFamily="34" charset="0"/>
+                <a:ea typeface="Calibri" pitchFamily="34" charset="-122"/>
+                <a:cs typeface="Calibri" pitchFamily="34" charset="-120"/>
+              </a:rPr>
+              <a:t>11</a:t>
+            </a:r>
+            <a:endParaRPr lang="en-US" sz="1600" dirty="0"/>
+          </a:p>
+        </p:txBody>
+      </p:sp>
+      <p:sp>
+        <p:nvSpPr>
+          <p:cNvPr id="4" name="Text 2"/>
+          <p:cNvSpPr/>
+          <p:nvPr/>
+        </p:nvSpPr>
+        <p:spPr>
+          <a:xfrm>
+            <a:off x="1078992" y="329184"/>
+            <a:ext cx="10607040" cy="475488"/>
+          </a:xfrm>
+          <a:prstGeom prst="rect">
+            <a:avLst/>
+          </a:prstGeom>
+          <a:noFill/>
+          <a:ln/>
+        </p:spPr>
+        <p:txBody>
+          <a:bodyPr wrap="square" lIns="0" tIns="0" rIns="0" bIns="0" rtlCol="0" anchor="ctr"/>
+          <a:lstStyle/>
+          <a:p>
+            <a:pPr indent="0" marL="0">
+              <a:buNone/>
+            </a:pPr>
+            <a:r>
+              <a:rPr lang="en-US" sz="3000" b="1" dirty="0">
+                <a:solidFill>
+                  <a:srgbClr val="16233A"/>
+                </a:solidFill>
+                <a:latin typeface="Cambria" pitchFamily="34" charset="0"/>
+                <a:ea typeface="Cambria" pitchFamily="34" charset="-122"/>
+                <a:cs typeface="Cambria" pitchFamily="34" charset="-120"/>
+              </a:rPr>
+              <a:t>The same nine observables: spreads against Geant4</a:t>
+            </a:r>
+            <a:endParaRPr lang="en-US" sz="3000" dirty="0"/>
+          </a:p>
+        </p:txBody>
+      </p:sp>
+      <p:sp>
+        <p:nvSpPr>
+          <p:cNvPr id="5" name="Text 3"/>
+          <p:cNvSpPr/>
+          <p:nvPr/>
+        </p:nvSpPr>
+        <p:spPr>
+          <a:xfrm>
+            <a:off x="1078992" y="822960"/>
+            <a:ext cx="10607040" cy="310896"/>
+          </a:xfrm>
+          <a:prstGeom prst="rect">
+            <a:avLst/>
+          </a:prstGeom>
+          <a:noFill/>
+          <a:ln/>
+        </p:spPr>
+        <p:txBody>
+          <a:bodyPr wrap="square" lIns="0" tIns="0" rIns="0" bIns="0" rtlCol="0" anchor="ctr"/>
+          <a:lstStyle/>
+          <a:p>
+            <a:pPr indent="0" marL="0">
+              <a:buNone/>
+            </a:pPr>
+            <a:r>
+              <a:rPr lang="en-US" sz="1300" dirty="0">
+                <a:solidFill>
+                  <a:srgbClr val="6B7A90"/>
+                </a:solidFill>
+                <a:latin typeface="Calibri" pitchFamily="34" charset="0"/>
+                <a:ea typeface="Calibri" pitchFamily="34" charset="-122"/>
+                <a:cs typeface="Calibri" pitchFamily="34" charset="-120"/>
+              </a:rPr>
+              <a:t>Event-to-event standard deviation. Getting the mean right is not the same as getting the width right.</a:t>
+            </a:r>
+            <a:endParaRPr lang="en-US" sz="1300" dirty="0"/>
+          </a:p>
+        </p:txBody>
+      </p:sp>
+      <p:pic>
+        <p:nvPicPr>
+          <p:cNvPr id="6" name="Image 0" descr="C:\Users\Julia\Desktop\coding\ASIoP\Fast MC CBSC\exhibition\current\diagnostics\feature_resolutions_vs_epoch.png">    </p:cNvPr>
+          <p:cNvPicPr>
+            <a:picLocks noChangeAspect="1"/>
+          </p:cNvPicPr>
+          <p:nvPr/>
+        </p:nvPicPr>
+        <p:blipFill>
+          <a:blip r:embed="rId1"/>
+          <a:stretch>
+            <a:fillRect/>
+          </a:stretch>
+        </p:blipFill>
+        <p:spPr>
+          <a:xfrm>
+            <a:off x="790448" y="1170432"/>
+            <a:ext cx="7197343" cy="5074920"/>
+          </a:xfrm>
+          <a:prstGeom prst="rect">
+            <a:avLst/>
+          </a:prstGeom>
+        </p:spPr>
+      </p:pic>
+      <p:sp>
+        <p:nvSpPr>
+          <p:cNvPr id="7" name="Text 4"/>
+          <p:cNvSpPr/>
+          <p:nvPr/>
+        </p:nvSpPr>
+        <p:spPr>
+          <a:xfrm>
+            <a:off x="8503920" y="1554480"/>
+            <a:ext cx="3291840" cy="4480560"/>
+          </a:xfrm>
+          <a:prstGeom prst="rect">
+            <a:avLst/>
+          </a:prstGeom>
+          <a:noFill/>
+          <a:ln/>
+        </p:spPr>
+        <p:txBody>
+          <a:bodyPr wrap="square" lIns="0" tIns="0" rIns="0" bIns="0" rtlCol="0" anchor="ctr"/>
+          <a:lstStyle/>
+          <a:p>
+            <a:pPr indent="0" marL="0">
+              <a:buNone/>
+            </a:pPr>
+            <a:r>
+              <a:rPr lang="en-US" sz="1250" b="1" dirty="0">
+                <a:solidFill>
+                  <a:srgbClr val="2E4A6B"/>
+                </a:solidFill>
+                <a:latin typeface="Calibri" pitchFamily="34" charset="0"/>
+                <a:ea typeface="Calibri" pitchFamily="34" charset="-122"/>
+                <a:cs typeface="Calibri" pitchFamily="34" charset="-120"/>
+              </a:rPr>
+              <a:t>Right mean, wrong width.
+</a:t>
+            </a:r>
+            <a:pPr indent="0" marL="0">
+              <a:buNone/>
+            </a:pPr>
+            <a:r>
+              <a:rPr lang="en-US" sz="1250" dirty="0">
+                <a:solidFill>
+                  <a:srgbClr val="2E4A6B"/>
+                </a:solidFill>
+                <a:latin typeface="Calibri" pitchFamily="34" charset="0"/>
+                <a:ea typeface="Calibri" pitchFamily="34" charset="-122"/>
+                <a:cs typeface="Calibri" pitchFamily="34" charset="-120"/>
+              </a:rPr>
+              <a:t>Fast-MC over-disperses total response: about 5.1 against Geant4's 4.4.</a:t>
+            </a:r>
+            <a:endParaRPr lang="en-US" sz="1250" dirty="0"/>
+          </a:p>
+          <a:p>
+            <a:pPr indent="0" marL="0">
+              <a:buNone/>
+            </a:pPr>
+            <a:endParaRPr lang="en-US" sz="1250" dirty="0"/>
+          </a:p>
+          <a:p>
+            <a:pPr indent="0" marL="0">
+              <a:buNone/>
+            </a:pPr>
+            <a:r>
+              <a:rPr lang="en-US" sz="1250" dirty="0">
+                <a:solidFill>
+                  <a:srgbClr val="2E4A6B"/>
+                </a:solidFill>
+                <a:latin typeface="Calibri" pitchFamily="34" charset="0"/>
+                <a:ea typeface="Calibri" pitchFamily="34" charset="-122"/>
+                <a:cs typeface="Calibri" pitchFamily="34" charset="-120"/>
+              </a:rPr>
+              <a:t>It under-disperses hit count and leading-cell fraction.</a:t>
+            </a:r>
+            <a:endParaRPr lang="en-US" sz="1250" dirty="0"/>
+          </a:p>
+          <a:p>
+            <a:pPr indent="0" marL="0">
+              <a:buNone/>
+            </a:pPr>
+            <a:endParaRPr lang="en-US" sz="1250" dirty="0"/>
+          </a:p>
+          <a:p>
+            <a:pPr indent="0" marL="0">
+              <a:buNone/>
+            </a:pPr>
+            <a:r>
+              <a:rPr lang="en-US" sz="1250" dirty="0">
+                <a:solidFill>
+                  <a:srgbClr val="2E4A6B"/>
+                </a:solidFill>
+                <a:latin typeface="Calibri" pitchFamily="34" charset="0"/>
+                <a:ea typeface="Calibri" pitchFamily="34" charset="-122"/>
+                <a:cs typeface="Calibri" pitchFamily="34" charset="-120"/>
+              </a:rPr>
+              <a:t>Hit count is the clearest case - the mean matches on the previous slide, the width does not.</a:t>
+            </a:r>
+            <a:endParaRPr lang="en-US" sz="1250" dirty="0"/>
+          </a:p>
+          <a:p>
+            <a:pPr indent="0" marL="0">
+              <a:buNone/>
+            </a:pPr>
+            <a:endParaRPr lang="en-US" sz="1250" dirty="0"/>
+          </a:p>
+          <a:p>
+            <a:pPr indent="0" marL="0">
+              <a:buNone/>
+            </a:pPr>
+            <a:r>
+              <a:rPr lang="en-US" sz="1250" dirty="0">
+                <a:solidFill>
+                  <a:srgbClr val="2E4A6B"/>
+                </a:solidFill>
+                <a:latin typeface="Calibri" pitchFamily="34" charset="0"/>
+                <a:ea typeface="Calibri" pitchFamily="34" charset="-122"/>
+                <a:cs typeface="Calibri" pitchFamily="34" charset="-120"/>
+              </a:rPr>
+              <a:t>This is exactly the kind of mismatch a classifier exploits.</a:t>
+            </a:r>
+            <a:endParaRPr lang="en-US" sz="1250" dirty="0"/>
+          </a:p>
+        </p:txBody>
+      </p:sp>
+    </p:spTree>
+  </p:cSld>
+  <p:clrMapOvr>
+    <a:masterClrMapping/>
+  </p:clrMapOvr>
+</p:sld>
+</file>
+
+<file path=ppt/slides/slide13.xml><?xml version="1.0" encoding="utf-8"?>
+<p:sld xmlns:a="http://schemas.openxmlformats.org/drawingml/2006/main" xmlns:r="http://schemas.openxmlformats.org/officeDocument/2006/relationships" xmlns:p="http://schemas.openxmlformats.org/presentationml/2006/main">
+  <p:cSld name="Slide 13">
+    <p:bg>
+      <p:bgPr>
+        <a:solidFill>
+          <a:srgbClr val="FFFFFF"/>
+        </a:solidFill>
+      </p:bgPr>
+    </p:bg>
+    <p:spTree>
+      <p:nvGrpSpPr>
+        <p:cNvPr id="1" name=""/>
+        <p:cNvGrpSpPr/>
+        <p:nvPr/>
+      </p:nvGrpSpPr>
+      <p:grpSpPr>
+        <a:xfrm>
+          <a:off x="0" y="0"/>
+          <a:ext cx="0" cy="0"/>
+          <a:chOff x="0" y="0"/>
+          <a:chExt cx="0" cy="0"/>
+        </a:xfrm>
+      </p:grpSpPr>
+      <p:sp>
+        <p:nvSpPr>
+          <p:cNvPr id="2" name="Shape 0"/>
+          <p:cNvSpPr/>
+          <p:nvPr/>
+        </p:nvSpPr>
+        <p:spPr>
+          <a:xfrm>
+            <a:off x="502920" y="384048"/>
+            <a:ext cx="420624" cy="420624"/>
+          </a:xfrm>
+          <a:prstGeom prst="ellipse">
+            <a:avLst/>
+          </a:prstGeom>
+          <a:solidFill>
+            <a:srgbClr val="9B4F9B"/>
+          </a:solidFill>
+          <a:ln/>
+        </p:spPr>
+      </p:sp>
+      <p:sp>
+        <p:nvSpPr>
+          <p:cNvPr id="3" name="Text 1"/>
+          <p:cNvSpPr/>
+          <p:nvPr/>
+        </p:nvSpPr>
+        <p:spPr>
+          <a:xfrm>
+            <a:off x="502920" y="384048"/>
+            <a:ext cx="420624" cy="420624"/>
+          </a:xfrm>
+          <a:prstGeom prst="rect">
+            <a:avLst/>
+          </a:prstGeom>
+          <a:noFill/>
+          <a:ln/>
+        </p:spPr>
+        <p:txBody>
+          <a:bodyPr wrap="square" lIns="0" tIns="0" rIns="0" bIns="0" rtlCol="0" anchor="ctr"/>
+          <a:lstStyle/>
+          <a:p>
+            <a:pPr algn="ctr" indent="0" marL="0">
+              <a:buNone/>
+            </a:pPr>
+            <a:r>
+              <a:rPr lang="en-US" sz="1600" b="1" dirty="0">
+                <a:solidFill>
+                  <a:srgbClr val="FFFFFF"/>
+                </a:solidFill>
+                <a:latin typeface="Calibri" pitchFamily="34" charset="0"/>
+                <a:ea typeface="Calibri" pitchFamily="34" charset="-122"/>
+                <a:cs typeface="Calibri" pitchFamily="34" charset="-120"/>
+              </a:rPr>
+              <a:t>12</a:t>
+            </a:r>
+            <a:endParaRPr lang="en-US" sz="1600" dirty="0"/>
+          </a:p>
+        </p:txBody>
+      </p:sp>
+      <p:sp>
+        <p:nvSpPr>
+          <p:cNvPr id="4" name="Text 2"/>
+          <p:cNvSpPr/>
+          <p:nvPr/>
+        </p:nvSpPr>
+        <p:spPr>
+          <a:xfrm>
+            <a:off x="1078992" y="329184"/>
+            <a:ext cx="10607040" cy="475488"/>
+          </a:xfrm>
+          <a:prstGeom prst="rect">
+            <a:avLst/>
+          </a:prstGeom>
+          <a:noFill/>
+          <a:ln/>
+        </p:spPr>
+        <p:txBody>
+          <a:bodyPr wrap="square" lIns="0" tIns="0" rIns="0" bIns="0" rtlCol="0" anchor="ctr"/>
+          <a:lstStyle/>
+          <a:p>
+            <a:pPr indent="0" marL="0">
+              <a:buNone/>
+            </a:pPr>
+            <a:r>
+              <a:rPr lang="en-US" sz="3000" b="1" dirty="0">
+                <a:solidFill>
+                  <a:srgbClr val="16233A"/>
+                </a:solidFill>
+                <a:latin typeface="Cambria" pitchFamily="34" charset="0"/>
+                <a:ea typeface="Cambria" pitchFamily="34" charset="-122"/>
+                <a:cs typeface="Cambria" pitchFamily="34" charset="-120"/>
+              </a:rPr>
+              <a:t>Same incident neutron, five stochastic Fast-MC showers</a:t>
+            </a:r>
+            <a:endParaRPr lang="en-US" sz="3000" dirty="0"/>
+          </a:p>
+        </p:txBody>
+      </p:sp>
+      <p:sp>
+        <p:nvSpPr>
+          <p:cNvPr id="5" name="Text 3"/>
+          <p:cNvSpPr/>
+          <p:nvPr/>
+        </p:nvSpPr>
+        <p:spPr>
+          <a:xfrm>
+            <a:off x="1078992" y="822960"/>
+            <a:ext cx="10607040" cy="310896"/>
+          </a:xfrm>
+          <a:prstGeom prst="rect">
+            <a:avLst/>
+          </a:prstGeom>
+          <a:noFill/>
+          <a:ln/>
+        </p:spPr>
+        <p:txBody>
+          <a:bodyPr wrap="square" lIns="0" tIns="0" rIns="0" bIns="0" rtlCol="0" anchor="ctr"/>
+          <a:lstStyle/>
+          <a:p>
+            <a:pPr indent="0" marL="0">
+              <a:buNone/>
+            </a:pPr>
+            <a:r>
+              <a:rPr lang="en-US" sz="1300" dirty="0">
+                <a:solidFill>
+                  <a:srgbClr val="6B7A90"/>
+                </a:solidFill>
+                <a:latin typeface="Calibri" pitchFamily="34" charset="0"/>
+                <a:ea typeface="Calibri" pitchFamily="34" charset="-122"/>
+                <a:cs typeface="Calibri" pitchFamily="34" charset="-120"/>
+              </a:rPr>
+              <a:t>Longitudinal energy profile for one fixed validation condition, per family. The Geant4 reference is identical in every panel.</a:t>
+            </a:r>
+            <a:endParaRPr lang="en-US" sz="1300" dirty="0"/>
+          </a:p>
+        </p:txBody>
+      </p:sp>
+      <p:pic>
+        <p:nvPicPr>
+          <p:cNvPr id="6" name="Image 0" descr="C:\Users\Julia\Desktop\coding\ASIoP\Fast MC CBSC\exhibition\current\model\10_same_condition_longitudinal_profiles.png">    </p:cNvPr>
+          <p:cNvPicPr>
+            <a:picLocks noChangeAspect="1"/>
+          </p:cNvPicPr>
+          <p:nvPr/>
+        </p:nvPicPr>
+        <p:blipFill>
+          <a:blip r:embed="rId1"/>
+          <a:stretch>
+            <a:fillRect/>
+          </a:stretch>
+        </p:blipFill>
+        <p:spPr>
+          <a:xfrm>
+            <a:off x="1973502" y="1243584"/>
+            <a:ext cx="8305956" cy="4846320"/>
+          </a:xfrm>
+          <a:prstGeom prst="rect">
+            <a:avLst/>
+          </a:prstGeom>
+        </p:spPr>
+      </p:pic>
+      <p:sp>
+        <p:nvSpPr>
+          <p:cNvPr id="7" name="Text 4"/>
+          <p:cNvSpPr/>
+          <p:nvPr/>
+        </p:nvSpPr>
+        <p:spPr>
+          <a:xfrm>
+            <a:off x="502920" y="6355080"/>
+            <a:ext cx="11155680" cy="292608"/>
+          </a:xfrm>
+          <a:prstGeom prst="rect">
+            <a:avLst/>
+          </a:prstGeom>
+          <a:noFill/>
+          <a:ln/>
+        </p:spPr>
+        <p:txBody>
+          <a:bodyPr wrap="square" lIns="0" tIns="0" rIns="0" bIns="0" rtlCol="0" anchor="ctr"/>
+          <a:lstStyle/>
+          <a:p>
+            <a:pPr indent="0" marL="0">
+              <a:buNone/>
+            </a:pPr>
+            <a:r>
+              <a:rPr lang="en-US" sz="1000" i="1" dirty="0">
+                <a:solidFill>
+                  <a:srgbClr val="6B7A90"/>
+                </a:solidFill>
+                <a:latin typeface="Calibri" pitchFamily="34" charset="0"/>
+                <a:ea typeface="Calibri" pitchFamily="34" charset="-122"/>
+                <a:cs typeface="Calibri" pitchFamily="34" charset="-120"/>
+              </a:rPr>
+              <a:t>One condition, illustrative rather than statistically representative. Note the ECAL layer-0 spike: Geant4 deposits ~10 GeV there and Fast-MC undershoots it by two orders of magnitude.</a:t>
+            </a:r>
+            <a:endParaRPr lang="en-US" sz="1000" dirty="0"/>
+          </a:p>
+        </p:txBody>
+      </p:sp>
+    </p:spTree>
+  </p:cSld>
+  <p:clrMapOvr>
+    <a:masterClrMapping/>
+  </p:clrMapOvr>
+</p:sld>
+</file>
+
+<file path=ppt/slides/slide14.xml><?xml version="1.0" encoding="utf-8"?>
+<p:sld xmlns:a="http://schemas.openxmlformats.org/drawingml/2006/main" xmlns:r="http://schemas.openxmlformats.org/officeDocument/2006/relationships" xmlns:p="http://schemas.openxmlformats.org/presentationml/2006/main">
+  <p:cSld name="Slide 14">
+    <p:bg>
+      <p:bgPr>
+        <a:solidFill>
+          <a:srgbClr val="FFFFFF"/>
+        </a:solidFill>
+      </p:bgPr>
+    </p:bg>
+    <p:spTree>
+      <p:nvGrpSpPr>
+        <p:cNvPr id="1" name=""/>
+        <p:cNvGrpSpPr/>
+        <p:nvPr/>
+      </p:nvGrpSpPr>
+      <p:grpSpPr>
+        <a:xfrm>
+          <a:off x="0" y="0"/>
+          <a:ext cx="0" cy="0"/>
+          <a:chOff x="0" y="0"/>
+          <a:chExt cx="0" cy="0"/>
+        </a:xfrm>
+      </p:grpSpPr>
+      <p:sp>
+        <p:nvSpPr>
+          <p:cNvPr id="2" name="Shape 0"/>
+          <p:cNvSpPr/>
+          <p:nvPr/>
+        </p:nvSpPr>
+        <p:spPr>
+          <a:xfrm>
+            <a:off x="502920" y="384048"/>
+            <a:ext cx="420624" cy="420624"/>
+          </a:xfrm>
+          <a:prstGeom prst="ellipse">
+            <a:avLst/>
+          </a:prstGeom>
+          <a:solidFill>
+            <a:srgbClr val="9B4F9B"/>
+          </a:solidFill>
+          <a:ln/>
+        </p:spPr>
+      </p:sp>
+      <p:sp>
+        <p:nvSpPr>
+          <p:cNvPr id="3" name="Text 1"/>
+          <p:cNvSpPr/>
+          <p:nvPr/>
+        </p:nvSpPr>
+        <p:spPr>
+          <a:xfrm>
+            <a:off x="502920" y="384048"/>
+            <a:ext cx="420624" cy="420624"/>
+          </a:xfrm>
+          <a:prstGeom prst="rect">
+            <a:avLst/>
+          </a:prstGeom>
+          <a:noFill/>
+          <a:ln/>
+        </p:spPr>
+        <p:txBody>
+          <a:bodyPr wrap="square" lIns="0" tIns="0" rIns="0" bIns="0" rtlCol="0" anchor="ctr"/>
+          <a:lstStyle/>
+          <a:p>
+            <a:pPr algn="ctr" indent="0" marL="0">
+              <a:buNone/>
+            </a:pPr>
+            <a:r>
+              <a:rPr lang="en-US" sz="1600" b="1" dirty="0">
+                <a:solidFill>
+                  <a:srgbClr val="FFFFFF"/>
+                </a:solidFill>
+                <a:latin typeface="Calibri" pitchFamily="34" charset="0"/>
+                <a:ea typeface="Calibri" pitchFamily="34" charset="-122"/>
+                <a:cs typeface="Calibri" pitchFamily="34" charset="-120"/>
+              </a:rPr>
+              <a:t>13</a:t>
+            </a:r>
+            <a:endParaRPr lang="en-US" sz="1600" dirty="0"/>
+          </a:p>
+        </p:txBody>
+      </p:sp>
+      <p:sp>
+        <p:nvSpPr>
+          <p:cNvPr id="4" name="Text 2"/>
+          <p:cNvSpPr/>
+          <p:nvPr/>
+        </p:nvSpPr>
+        <p:spPr>
+          <a:xfrm>
+            <a:off x="1078992" y="329184"/>
+            <a:ext cx="10607040" cy="475488"/>
+          </a:xfrm>
+          <a:prstGeom prst="rect">
+            <a:avLst/>
+          </a:prstGeom>
+          <a:noFill/>
+          <a:ln/>
+        </p:spPr>
+        <p:txBody>
+          <a:bodyPr wrap="square" lIns="0" tIns="0" rIns="0" bIns="0" rtlCol="0" anchor="ctr"/>
+          <a:lstStyle/>
+          <a:p>
+            <a:pPr indent="0" marL="0">
+              <a:buNone/>
+            </a:pPr>
+            <a:r>
+              <a:rPr lang="en-US" sz="3000" b="1" dirty="0">
+                <a:solidFill>
+                  <a:srgbClr val="16233A"/>
+                </a:solidFill>
+                <a:latin typeface="Cambria" pitchFamily="34" charset="0"/>
+                <a:ea typeface="Cambria" pitchFamily="34" charset="-122"/>
+                <a:cs typeface="Cambria" pitchFamily="34" charset="-120"/>
+              </a:rPr>
+              <a:t>One Geant4 shower and five Fast-MC draws, same four-momentum</a:t>
+            </a:r>
+            <a:endParaRPr lang="en-US" sz="3000" dirty="0"/>
+          </a:p>
+        </p:txBody>
+      </p:sp>
+      <p:sp>
+        <p:nvSpPr>
+          <p:cNvPr id="5" name="Text 3"/>
+          <p:cNvSpPr/>
+          <p:nvPr/>
+        </p:nvSpPr>
+        <p:spPr>
+          <a:xfrm>
+            <a:off x="1078992" y="822960"/>
+            <a:ext cx="10607040" cy="310896"/>
+          </a:xfrm>
+          <a:prstGeom prst="rect">
+            <a:avLst/>
+          </a:prstGeom>
+          <a:noFill/>
+          <a:ln/>
+        </p:spPr>
+        <p:txBody>
+          <a:bodyPr wrap="square" lIns="0" tIns="0" rIns="0" bIns="0" rtlCol="0" anchor="ctr"/>
+          <a:lstStyle/>
+          <a:p>
+            <a:pPr indent="0" marL="0">
+              <a:buNone/>
+            </a:pPr>
+            <a:r>
+              <a:rPr lang="en-US" sz="1300" dirty="0">
+                <a:solidFill>
+                  <a:srgbClr val="6B7A90"/>
+                </a:solidFill>
+                <a:latin typeface="Calibri" pitchFamily="34" charset="0"/>
+                <a:ea typeface="Calibri" pitchFamily="34" charset="-122"/>
+                <a:cs typeface="Calibri" pitchFamily="34" charset="-120"/>
+              </a:rPr>
+              <a:t>Lowest accepted-loss family · epoch 22 · K_inc = 133 GeV · top 1,000 cells by deposited energy per panel.</a:t>
+            </a:r>
+            <a:endParaRPr lang="en-US" sz="1300" dirty="0"/>
+          </a:p>
+        </p:txBody>
+      </p:sp>
+      <p:pic>
+        <p:nvPicPr>
+          <p:cNvPr id="6" name="Image 0" descr="C:\Users\Julia\Desktop\coding\ASIoP\Fast MC CBSC\exhibition\current\model\12_same_condition_3d_energy_deposits.png">    </p:cNvPr>
+          <p:cNvPicPr>
+            <a:picLocks noChangeAspect="1"/>
+          </p:cNvPicPr>
+          <p:nvPr/>
+        </p:nvPicPr>
+        <p:blipFill>
+          <a:blip r:embed="rId1"/>
+          <a:stretch>
+            <a:fillRect/>
+          </a:stretch>
+        </p:blipFill>
+        <p:spPr>
+          <a:xfrm>
+            <a:off x="1800167" y="1243584"/>
+            <a:ext cx="8652627" cy="4846320"/>
+          </a:xfrm>
+          <a:prstGeom prst="rect">
+            <a:avLst/>
+          </a:prstGeom>
+        </p:spPr>
+      </p:pic>
+      <p:sp>
+        <p:nvSpPr>
+          <p:cNvPr id="7" name="Text 4"/>
+          <p:cNvSpPr/>
+          <p:nvPr/>
+        </p:nvSpPr>
+        <p:spPr>
+          <a:xfrm>
+            <a:off x="502920" y="6355080"/>
+            <a:ext cx="11155680" cy="292608"/>
+          </a:xfrm>
+          <a:prstGeom prst="rect">
+            <a:avLst/>
+          </a:prstGeom>
+          <a:noFill/>
+          <a:ln/>
+        </p:spPr>
+        <p:txBody>
+          <a:bodyPr wrap="square" lIns="0" tIns="0" rIns="0" bIns="0" rtlCol="0" anchor="ctr"/>
+          <a:lstStyle/>
+          <a:p>
+            <a:pPr indent="0" marL="0">
+              <a:buNone/>
+            </a:pPr>
+            <a:r>
+              <a:rPr lang="en-US" sz="1000" i="1" dirty="0">
+                <a:solidFill>
+                  <a:srgbClr val="6B7A90"/>
+                </a:solidFill>
+                <a:latin typeface="Calibri" pitchFamily="34" charset="0"/>
+                <a:ea typeface="Calibri" pitchFamily="34" charset="-122"/>
+                <a:cs typeface="Calibri" pitchFamily="34" charset="-120"/>
+              </a:rPr>
+              <a:t>The five draws differ because the generator is stochastic. Plausible-looking events are not evidence of fidelity.</a:t>
+            </a:r>
+            <a:endParaRPr lang="en-US" sz="1000" dirty="0"/>
+          </a:p>
+        </p:txBody>
+      </p:sp>
+    </p:spTree>
+  </p:cSld>
+  <p:clrMapOvr>
+    <a:masterClrMapping/>
+  </p:clrMapOvr>
+</p:sld>
+</file>
+
+<file path=ppt/slides/slide15.xml><?xml version="1.0" encoding="utf-8"?>
+<p:sld xmlns:a="http://schemas.openxmlformats.org/drawingml/2006/main" xmlns:r="http://schemas.openxmlformats.org/officeDocument/2006/relationships" xmlns:p="http://schemas.openxmlformats.org/presentationml/2006/main">
+  <p:cSld name="Slide 15">
+    <p:bg>
+      <p:bgPr>
+        <a:solidFill>
+          <a:srgbClr val="FFFFFF"/>
+        </a:solidFill>
+      </p:bgPr>
+    </p:bg>
+    <p:spTree>
+      <p:nvGrpSpPr>
+        <p:cNvPr id="1" name=""/>
+        <p:cNvGrpSpPr/>
+        <p:nvPr/>
+      </p:nvGrpSpPr>
+      <p:grpSpPr>
+        <a:xfrm>
+          <a:off x="0" y="0"/>
+          <a:ext cx="0" cy="0"/>
+          <a:chOff x="0" y="0"/>
+          <a:chExt cx="0" cy="0"/>
+        </a:xfrm>
+      </p:grpSpPr>
+      <p:sp>
+        <p:nvSpPr>
+          <p:cNvPr id="2" name="Shape 0"/>
+          <p:cNvSpPr/>
+          <p:nvPr/>
+        </p:nvSpPr>
+        <p:spPr>
+          <a:xfrm>
+            <a:off x="502920" y="384048"/>
+            <a:ext cx="420624" cy="420624"/>
+          </a:xfrm>
+          <a:prstGeom prst="ellipse">
+            <a:avLst/>
+          </a:prstGeom>
+          <a:solidFill>
+            <a:srgbClr val="9B4F9B"/>
+          </a:solidFill>
+          <a:ln/>
+        </p:spPr>
+      </p:sp>
+      <p:sp>
+        <p:nvSpPr>
+          <p:cNvPr id="3" name="Text 1"/>
+          <p:cNvSpPr/>
+          <p:nvPr/>
+        </p:nvSpPr>
+        <p:spPr>
+          <a:xfrm>
+            <a:off x="502920" y="384048"/>
+            <a:ext cx="420624" cy="420624"/>
+          </a:xfrm>
+          <a:prstGeom prst="rect">
+            <a:avLst/>
+          </a:prstGeom>
+          <a:noFill/>
+          <a:ln/>
+        </p:spPr>
+        <p:txBody>
+          <a:bodyPr wrap="square" lIns="0" tIns="0" rIns="0" bIns="0" rtlCol="0" anchor="ctr"/>
+          <a:lstStyle/>
+          <a:p>
+            <a:pPr algn="ctr" indent="0" marL="0">
+              <a:buNone/>
+            </a:pPr>
+            <a:r>
+              <a:rPr lang="en-US" sz="1600" b="1" dirty="0">
+                <a:solidFill>
+                  <a:srgbClr val="FFFFFF"/>
+                </a:solidFill>
+                <a:latin typeface="Calibri" pitchFamily="34" charset="0"/>
+                <a:ea typeface="Calibri" pitchFamily="34" charset="-122"/>
+                <a:cs typeface="Calibri" pitchFamily="34" charset="-120"/>
+              </a:rPr>
+              <a:t>14</a:t>
+            </a:r>
+            <a:endParaRPr lang="en-US" sz="1600" dirty="0"/>
+          </a:p>
+        </p:txBody>
+      </p:sp>
+      <p:sp>
+        <p:nvSpPr>
+          <p:cNvPr id="4" name="Text 2"/>
+          <p:cNvSpPr/>
+          <p:nvPr/>
+        </p:nvSpPr>
+        <p:spPr>
+          <a:xfrm>
+            <a:off x="1078992" y="329184"/>
+            <a:ext cx="10607040" cy="475488"/>
+          </a:xfrm>
+          <a:prstGeom prst="rect">
+            <a:avLst/>
+          </a:prstGeom>
+          <a:noFill/>
+          <a:ln/>
+        </p:spPr>
+        <p:txBody>
+          <a:bodyPr wrap="square" lIns="0" tIns="0" rIns="0" bIns="0" rtlCol="0" anchor="ctr"/>
+          <a:lstStyle/>
+          <a:p>
+            <a:pPr indent="0" marL="0">
+              <a:buNone/>
+            </a:pPr>
+            <a:r>
+              <a:rPr lang="en-US" sz="3000" b="1" dirty="0">
+                <a:solidFill>
+                  <a:srgbClr val="16233A"/>
+                </a:solidFill>
+                <a:latin typeface="Cambria" pitchFamily="34" charset="0"/>
+                <a:ea typeface="Cambria" pitchFamily="34" charset="-122"/>
+                <a:cs typeface="Cambria" pitchFamily="34" charset="-120"/>
+              </a:rPr>
+              <a:t>Fixed-condition validation distributions</a:t>
+            </a:r>
+            <a:endParaRPr lang="en-US" sz="3000" dirty="0"/>
+          </a:p>
+        </p:txBody>
+      </p:sp>
+      <p:sp>
+        <p:nvSpPr>
+          <p:cNvPr id="5" name="Text 3"/>
+          <p:cNvSpPr/>
+          <p:nvPr/>
+        </p:nvSpPr>
+        <p:spPr>
+          <a:xfrm>
+            <a:off x="1078992" y="822960"/>
+            <a:ext cx="10607040" cy="310896"/>
+          </a:xfrm>
+          <a:prstGeom prst="rect">
+            <a:avLst/>
+          </a:prstGeom>
+          <a:noFill/>
+          <a:ln/>
+        </p:spPr>
+        <p:txBody>
+          <a:bodyPr wrap="square" lIns="0" tIns="0" rIns="0" bIns="0" rtlCol="0" anchor="ctr"/>
+          <a:lstStyle/>
+          <a:p>
+            <a:pPr indent="0" marL="0">
+              <a:buNone/>
+            </a:pPr>
+            <a:r>
+              <a:rPr lang="en-US" sz="1300" dirty="0">
+                <a:solidFill>
+                  <a:srgbClr val="6B7A90"/>
+                </a:solidFill>
+                <a:latin typeface="Calibri" pitchFamily="34" charset="0"/>
+                <a:ea typeface="Calibri" pitchFamily="34" charset="-122"/>
+                <a:cs typeface="Calibri" pitchFamily="34" charset="-120"/>
+              </a:rPr>
+              <a:t>50 Geant4 events against 250 conditional Fast-MC draws, best family, epoch 22.</a:t>
+            </a:r>
+            <a:endParaRPr lang="en-US" sz="1300" dirty="0"/>
+          </a:p>
+        </p:txBody>
+      </p:sp>
+      <p:pic>
+        <p:nvPicPr>
+          <p:cNvPr id="6" name="Image 0" descr="C:\Users\Julia\Desktop\coding\ASIoP\Fast MC CBSC\exhibition\current\model\11_best_model_sample_distributions.png">    </p:cNvPr>
+          <p:cNvPicPr>
+            <a:picLocks noChangeAspect="1"/>
+          </p:cNvPicPr>
+          <p:nvPr/>
+        </p:nvPicPr>
+        <p:blipFill>
+          <a:blip r:embed="rId1"/>
+          <a:stretch>
+            <a:fillRect/>
+          </a:stretch>
+        </p:blipFill>
+        <p:spPr>
+          <a:xfrm>
+            <a:off x="2072851" y="1243584"/>
+            <a:ext cx="8052393" cy="4800600"/>
+          </a:xfrm>
+          <a:prstGeom prst="rect">
+            <a:avLst/>
+          </a:prstGeom>
+        </p:spPr>
+      </p:pic>
+      <p:sp>
+        <p:nvSpPr>
+          <p:cNvPr id="7" name="Text 4"/>
+          <p:cNvSpPr/>
+          <p:nvPr/>
+        </p:nvSpPr>
+        <p:spPr>
+          <a:xfrm>
+            <a:off x="502920" y="6355080"/>
+            <a:ext cx="11155680" cy="292608"/>
+          </a:xfrm>
+          <a:prstGeom prst="rect">
+            <a:avLst/>
+          </a:prstGeom>
+          <a:noFill/>
+          <a:ln/>
+        </p:spPr>
+        <p:txBody>
+          <a:bodyPr wrap="square" lIns="0" tIns="0" rIns="0" bIns="0" rtlCol="0" anchor="ctr"/>
+          <a:lstStyle/>
+          <a:p>
+            <a:pPr indent="0" marL="0">
+              <a:buNone/>
+            </a:pPr>
+            <a:r>
+              <a:rPr lang="en-US" sz="1000" i="1" dirty="0">
+                <a:solidFill>
+                  <a:srgbClr val="6B7A90"/>
+                </a:solidFill>
+                <a:latin typeface="Calibri" pitchFamily="34" charset="0"/>
+                <a:ea typeface="Calibri" pitchFamily="34" charset="-122"/>
+                <a:cs typeface="Calibri" pitchFamily="34" charset="-120"/>
+              </a:rPr>
+              <a:t>Total response and radial RMS track well; positive-cell count and depth centroid show the largest residual disagreement.</a:t>
+            </a:r>
+            <a:endParaRPr lang="en-US" sz="1000" dirty="0"/>
+          </a:p>
+        </p:txBody>
+      </p:sp>
+    </p:spTree>
+  </p:cSld>
+  <p:clrMapOvr>
+    <a:masterClrMapping/>
+  </p:clrMapOvr>
+</p:sld>
+</file>
+
+<file path=ppt/slides/slide16.xml><?xml version="1.0" encoding="utf-8"?>
+<p:sld xmlns:a="http://schemas.openxmlformats.org/drawingml/2006/main" xmlns:r="http://schemas.openxmlformats.org/officeDocument/2006/relationships" xmlns:p="http://schemas.openxmlformats.org/presentationml/2006/main">
+  <p:cSld name="Slide 16">
     <p:bg>
       <p:bgPr>
         <a:solidFill>
@@ -2867,9 +4640,9 @@
 </p:sld>
 </file>
 
-<file path=ppt/slides/slide12.xml><?xml version="1.0" encoding="utf-8"?>
+<file path=ppt/slides/slide17.xml><?xml version="1.0" encoding="utf-8"?>
 <p:sld xmlns:a="http://schemas.openxmlformats.org/drawingml/2006/main" xmlns:r="http://schemas.openxmlformats.org/officeDocument/2006/relationships" xmlns:p="http://schemas.openxmlformats.org/presentationml/2006/main">
-  <p:cSld name="Slide 12">
+  <p:cSld name="Slide 17">
     <p:bg>
       <p:bgPr>
         <a:solidFill>
@@ -6759,7 +8532,7 @@
                 <a:ea typeface="Cambria" pitchFamily="34" charset="-122"/>
                 <a:cs typeface="Cambria" pitchFamily="34" charset="-120"/>
               </a:rPr>
-              <a:t>Can a classifier still tell the two generators apart?</a:t>
+              <a:t>Response bias resolved by incident energy, every epoch</a:t>
             </a:r>
             <a:endParaRPr lang="en-US" sz="3000" dirty="0"/>
           </a:p>
@@ -6798,7 +8571,7 @@
                 <a:ea typeface="Calibri" pitchFamily="34" charset="-122"/>
                 <a:cs typeface="Calibri" pitchFamily="34" charset="-120"/>
               </a:rPr>
-              <a:t>Yes — and this is the single most important negative result in the project.</a:t>
+              <a:t>Dotted red are the predeclared thresholds. Purple dashed marks a quarantined checkpoint.</a:t>
             </a:r>
             <a:endParaRPr lang="en-US" sz="1300" dirty="0"/>
           </a:p>
@@ -6806,7 +8579,7 @@
       </p:sp>
       <p:pic>
         <p:nvPicPr>
-          <p:cNvPr id="6" name="Image 0" descr="C:\Users\Julia\Desktop\coding\ASIoP\Fast MC CBSC\exhibition\current\external_metrics\current_auroc_seed_spread.png">    </p:cNvPr>
+          <p:cNvPr id="6" name="Image 0" descr="C:\Users\Julia\Desktop\coding\ASIoP\Fast MC CBSC\exhibition\current\diagnostics\energy_bins_vs_epoch.png">    </p:cNvPr>
           <p:cNvPicPr>
             <a:picLocks noChangeAspect="1"/>
           </p:cNvPicPr>
@@ -6820,8 +8593,8 @@
         </p:blipFill>
         <p:spPr>
           <a:xfrm>
-            <a:off x="502920" y="1294892"/>
-            <a:ext cx="6675120" cy="3856736"/>
+            <a:off x="457200" y="1282584"/>
+            <a:ext cx="11338560" cy="4082519"/>
           </a:xfrm>
           <a:prstGeom prst="rect">
             <a:avLst/>
@@ -6836,8 +8609,8 @@
         </p:nvSpPr>
         <p:spPr>
           <a:xfrm>
-            <a:off x="7452360" y="1298448"/>
-            <a:ext cx="4297680" cy="274320"/>
+            <a:off x="822960" y="5532120"/>
+            <a:ext cx="10607040" cy="685800"/>
           </a:xfrm>
           <a:prstGeom prst="rect">
             <a:avLst/>
@@ -6853,73 +8626,7 @@
               <a:buNone/>
             </a:pPr>
             <a:r>
-              <a:rPr lang="en-US" sz="1200" b="1" dirty="0">
-                <a:solidFill>
-                  <a:srgbClr val="9B4F9B"/>
-                </a:solidFill>
-                <a:latin typeface="Calibri" pitchFamily="34" charset="0"/>
-                <a:ea typeface="Calibri" pitchFamily="34" charset="-122"/>
-                <a:cs typeface="Calibri" pitchFamily="34" charset="-120"/>
-              </a:rPr>
-              <a:t>Today, epoch 38</a:t>
-            </a:r>
-            <a:endParaRPr lang="en-US" sz="1200" dirty="0"/>
-          </a:p>
-        </p:txBody>
-      </p:sp>
-      <p:sp>
-        <p:nvSpPr>
-          <p:cNvPr id="8" name="Shape 5"/>
-          <p:cNvSpPr/>
-          <p:nvPr/>
-        </p:nvSpPr>
-        <p:spPr>
-          <a:xfrm>
-            <a:off x="7452360" y="1645920"/>
-            <a:ext cx="4297680" cy="713232"/>
-          </a:xfrm>
-          <a:prstGeom prst="roundRect">
-            <a:avLst>
-              <a:gd name="adj" fmla="val 6410"/>
-            </a:avLst>
-          </a:prstGeom>
-          <a:solidFill>
-            <a:srgbClr val="F4F6FA"/>
-          </a:solidFill>
-          <a:ln w="12700">
-            <a:solidFill>
-              <a:srgbClr val="F4F6FA"/>
-            </a:solidFill>
-            <a:prstDash val="solid"/>
-          </a:ln>
-        </p:spPr>
-      </p:sp>
-      <p:sp>
-        <p:nvSpPr>
-          <p:cNvPr id="9" name="Text 6"/>
-          <p:cNvSpPr/>
-          <p:nvPr/>
-        </p:nvSpPr>
-        <p:spPr>
-          <a:xfrm>
-            <a:off x="7598664" y="1700784"/>
-            <a:ext cx="2743200" cy="603504"/>
-          </a:xfrm>
-          <a:prstGeom prst="rect">
-            <a:avLst/>
-          </a:prstGeom>
-          <a:noFill/>
-          <a:ln/>
-        </p:spPr>
-        <p:txBody>
-          <a:bodyPr wrap="square" lIns="0" tIns="0" rIns="0" bIns="0" rtlCol="0" anchor="ctr"/>
-          <a:lstStyle/>
-          <a:p>
-            <a:pPr indent="0" marL="0">
-              <a:buNone/>
-            </a:pPr>
-            <a:r>
-              <a:rPr lang="en-US" sz="1150" dirty="0">
+              <a:rPr lang="en-US" sz="1300" dirty="0">
                 <a:solidFill>
                   <a:srgbClr val="2E4A6B"/>
                 </a:solidFill>
@@ -6927,363 +8634,9 @@
                 <a:ea typeface="Calibri" pitchFamily="34" charset="-122"/>
                 <a:cs typeface="Calibri" pitchFamily="34" charset="-120"/>
               </a:rPr>
-              <a:t>Low-level hybrid, 3 seeds</a:t>
-            </a:r>
-            <a:endParaRPr lang="en-US" sz="1150" dirty="0"/>
-          </a:p>
-        </p:txBody>
-      </p:sp>
-      <p:sp>
-        <p:nvSpPr>
-          <p:cNvPr id="10" name="Text 7"/>
-          <p:cNvSpPr/>
-          <p:nvPr/>
-        </p:nvSpPr>
-        <p:spPr>
-          <a:xfrm>
-            <a:off x="10104120" y="1700784"/>
-            <a:ext cx="1554480" cy="603504"/>
-          </a:xfrm>
-          <a:prstGeom prst="rect">
-            <a:avLst/>
-          </a:prstGeom>
-          <a:noFill/>
-          <a:ln/>
-        </p:spPr>
-        <p:txBody>
-          <a:bodyPr wrap="square" lIns="0" tIns="0" rIns="0" bIns="0" rtlCol="0" anchor="ctr"/>
-          <a:lstStyle/>
-          <a:p>
-            <a:pPr algn="r" indent="0" marL="0">
-              <a:buNone/>
-            </a:pPr>
-            <a:r>
-              <a:rPr lang="en-US" sz="1400" b="1" dirty="0">
-                <a:solidFill>
-                  <a:srgbClr val="9B4F9B"/>
-                </a:solidFill>
-                <a:latin typeface="Cambria" pitchFamily="34" charset="0"/>
-                <a:ea typeface="Cambria" pitchFamily="34" charset="-122"/>
-                <a:cs typeface="Cambria" pitchFamily="34" charset="-120"/>
-              </a:rPr>
-              <a:t>0.8727 ± 0.0117</a:t>
-            </a:r>
-            <a:endParaRPr lang="en-US" sz="1400" dirty="0"/>
-          </a:p>
-        </p:txBody>
-      </p:sp>
-      <p:sp>
-        <p:nvSpPr>
-          <p:cNvPr id="11" name="Shape 8"/>
-          <p:cNvSpPr/>
-          <p:nvPr/>
-        </p:nvSpPr>
-        <p:spPr>
-          <a:xfrm>
-            <a:off x="7452360" y="2468880"/>
-            <a:ext cx="4297680" cy="713232"/>
-          </a:xfrm>
-          <a:prstGeom prst="roundRect">
-            <a:avLst>
-              <a:gd name="adj" fmla="val 6410"/>
-            </a:avLst>
-          </a:prstGeom>
-          <a:solidFill>
-            <a:srgbClr val="F4F6FA"/>
-          </a:solidFill>
-          <a:ln w="12700">
-            <a:solidFill>
-              <a:srgbClr val="F4F6FA"/>
-            </a:solidFill>
-            <a:prstDash val="solid"/>
-          </a:ln>
-        </p:spPr>
-      </p:sp>
-      <p:sp>
-        <p:nvSpPr>
-          <p:cNvPr id="12" name="Text 9"/>
-          <p:cNvSpPr/>
-          <p:nvPr/>
-        </p:nvSpPr>
-        <p:spPr>
-          <a:xfrm>
-            <a:off x="7598664" y="2523744"/>
-            <a:ext cx="2743200" cy="603504"/>
-          </a:xfrm>
-          <a:prstGeom prst="rect">
-            <a:avLst/>
-          </a:prstGeom>
-          <a:noFill/>
-          <a:ln/>
-        </p:spPr>
-        <p:txBody>
-          <a:bodyPr wrap="square" lIns="0" tIns="0" rIns="0" bIns="0" rtlCol="0" anchor="ctr"/>
-          <a:lstStyle/>
-          <a:p>
-            <a:pPr indent="0" marL="0">
-              <a:buNone/>
-            </a:pPr>
-            <a:r>
-              <a:rPr lang="en-US" sz="1150" dirty="0">
-                <a:solidFill>
-                  <a:srgbClr val="2E4A6B"/>
-                </a:solidFill>
-                <a:latin typeface="Calibri" pitchFamily="34" charset="0"/>
-                <a:ea typeface="Calibri" pitchFamily="34" charset="-122"/>
-                <a:cs typeface="Calibri" pitchFamily="34" charset="-120"/>
-              </a:rPr>
-              <a:t>High-level GBM control</a:t>
-            </a:r>
-            <a:endParaRPr lang="en-US" sz="1150" dirty="0"/>
-          </a:p>
-        </p:txBody>
-      </p:sp>
-      <p:sp>
-        <p:nvSpPr>
-          <p:cNvPr id="13" name="Text 10"/>
-          <p:cNvSpPr/>
-          <p:nvPr/>
-        </p:nvSpPr>
-        <p:spPr>
-          <a:xfrm>
-            <a:off x="10104120" y="2523744"/>
-            <a:ext cx="1554480" cy="603504"/>
-          </a:xfrm>
-          <a:prstGeom prst="rect">
-            <a:avLst/>
-          </a:prstGeom>
-          <a:noFill/>
-          <a:ln/>
-        </p:spPr>
-        <p:txBody>
-          <a:bodyPr wrap="square" lIns="0" tIns="0" rIns="0" bIns="0" rtlCol="0" anchor="ctr"/>
-          <a:lstStyle/>
-          <a:p>
-            <a:pPr algn="r" indent="0" marL="0">
-              <a:buNone/>
-            </a:pPr>
-            <a:r>
-              <a:rPr lang="en-US" sz="1400" b="1" dirty="0">
-                <a:solidFill>
-                  <a:srgbClr val="2E4A6B"/>
-                </a:solidFill>
-                <a:latin typeface="Cambria" pitchFamily="34" charset="0"/>
-                <a:ea typeface="Cambria" pitchFamily="34" charset="-122"/>
-                <a:cs typeface="Cambria" pitchFamily="34" charset="-120"/>
-              </a:rPr>
-              <a:t>0.9291</a:t>
-            </a:r>
-            <a:endParaRPr lang="en-US" sz="1400" dirty="0"/>
-          </a:p>
-        </p:txBody>
-      </p:sp>
-      <p:sp>
-        <p:nvSpPr>
-          <p:cNvPr id="14" name="Shape 11"/>
-          <p:cNvSpPr/>
-          <p:nvPr/>
-        </p:nvSpPr>
-        <p:spPr>
-          <a:xfrm>
-            <a:off x="7452360" y="3291840"/>
-            <a:ext cx="4297680" cy="713232"/>
-          </a:xfrm>
-          <a:prstGeom prst="roundRect">
-            <a:avLst>
-              <a:gd name="adj" fmla="val 6410"/>
-            </a:avLst>
-          </a:prstGeom>
-          <a:solidFill>
-            <a:srgbClr val="F4F6FA"/>
-          </a:solidFill>
-          <a:ln w="12700">
-            <a:solidFill>
-              <a:srgbClr val="F4F6FA"/>
-            </a:solidFill>
-            <a:prstDash val="solid"/>
-          </a:ln>
-        </p:spPr>
-      </p:sp>
-      <p:sp>
-        <p:nvSpPr>
-          <p:cNvPr id="15" name="Text 12"/>
-          <p:cNvSpPr/>
-          <p:nvPr/>
-        </p:nvSpPr>
-        <p:spPr>
-          <a:xfrm>
-            <a:off x="7598664" y="3346704"/>
-            <a:ext cx="2743200" cy="603504"/>
-          </a:xfrm>
-          <a:prstGeom prst="rect">
-            <a:avLst/>
-          </a:prstGeom>
-          <a:noFill/>
-          <a:ln/>
-        </p:spPr>
-        <p:txBody>
-          <a:bodyPr wrap="square" lIns="0" tIns="0" rIns="0" bIns="0" rtlCol="0" anchor="ctr"/>
-          <a:lstStyle/>
-          <a:p>
-            <a:pPr indent="0" marL="0">
-              <a:buNone/>
-            </a:pPr>
-            <a:r>
-              <a:rPr lang="en-US" sz="1150" dirty="0">
-                <a:solidFill>
-                  <a:srgbClr val="2E4A6B"/>
-                </a:solidFill>
-                <a:latin typeface="Calibri" pitchFamily="34" charset="0"/>
-                <a:ea typeface="Calibri" pitchFamily="34" charset="-122"/>
-                <a:cs typeface="Calibri" pitchFamily="34" charset="-120"/>
-              </a:rPr>
-              <a:t>Condition-only control</a:t>
-            </a:r>
-            <a:endParaRPr lang="en-US" sz="1150" dirty="0"/>
-          </a:p>
-        </p:txBody>
-      </p:sp>
-      <p:sp>
-        <p:nvSpPr>
-          <p:cNvPr id="16" name="Text 13"/>
-          <p:cNvSpPr/>
-          <p:nvPr/>
-        </p:nvSpPr>
-        <p:spPr>
-          <a:xfrm>
-            <a:off x="10104120" y="3346704"/>
-            <a:ext cx="1554480" cy="603504"/>
-          </a:xfrm>
-          <a:prstGeom prst="rect">
-            <a:avLst/>
-          </a:prstGeom>
-          <a:noFill/>
-          <a:ln/>
-        </p:spPr>
-        <p:txBody>
-          <a:bodyPr wrap="square" lIns="0" tIns="0" rIns="0" bIns="0" rtlCol="0" anchor="ctr"/>
-          <a:lstStyle/>
-          <a:p>
-            <a:pPr algn="r" indent="0" marL="0">
-              <a:buNone/>
-            </a:pPr>
-            <a:r>
-              <a:rPr lang="en-US" sz="1400" b="1" dirty="0">
-                <a:solidFill>
-                  <a:srgbClr val="6B7A90"/>
-                </a:solidFill>
-                <a:latin typeface="Cambria" pitchFamily="34" charset="0"/>
-                <a:ea typeface="Cambria" pitchFamily="34" charset="-122"/>
-                <a:cs typeface="Cambria" pitchFamily="34" charset="-120"/>
-              </a:rPr>
-              <a:t>0.5000  (p = 1.0)</a:t>
-            </a:r>
-            <a:endParaRPr lang="en-US" sz="1400" dirty="0"/>
-          </a:p>
-        </p:txBody>
-      </p:sp>
-      <p:sp>
-        <p:nvSpPr>
-          <p:cNvPr id="17" name="Shape 14"/>
-          <p:cNvSpPr/>
-          <p:nvPr/>
-        </p:nvSpPr>
-        <p:spPr>
-          <a:xfrm>
-            <a:off x="7452360" y="4206240"/>
-            <a:ext cx="4297680" cy="960120"/>
-          </a:xfrm>
-          <a:prstGeom prst="roundRect">
-            <a:avLst>
-              <a:gd name="adj" fmla="val 4762"/>
-            </a:avLst>
-          </a:prstGeom>
-          <a:solidFill>
-            <a:srgbClr val="FBE9E9"/>
-          </a:solidFill>
-          <a:ln w="12700">
-            <a:solidFill>
-              <a:srgbClr val="FBE9E9"/>
-            </a:solidFill>
-            <a:prstDash val="solid"/>
-          </a:ln>
-        </p:spPr>
-      </p:sp>
-      <p:sp>
-        <p:nvSpPr>
-          <p:cNvPr id="18" name="Text 15"/>
-          <p:cNvSpPr/>
-          <p:nvPr/>
-        </p:nvSpPr>
-        <p:spPr>
-          <a:xfrm>
-            <a:off x="7616952" y="4315968"/>
-            <a:ext cx="3977640" cy="749808"/>
-          </a:xfrm>
-          <a:prstGeom prst="rect">
-            <a:avLst/>
-          </a:prstGeom>
-          <a:noFill/>
-          <a:ln/>
-        </p:spPr>
-        <p:txBody>
-          <a:bodyPr wrap="square" lIns="0" tIns="0" rIns="0" bIns="0" rtlCol="0" anchor="ctr"/>
-          <a:lstStyle/>
-          <a:p>
-            <a:pPr indent="0" marL="0">
-              <a:buNone/>
-            </a:pPr>
-            <a:r>
-              <a:rPr lang="en-US" sz="1150" b="1" dirty="0">
-                <a:solidFill>
-                  <a:srgbClr val="8C2F2F"/>
-                </a:solidFill>
-                <a:latin typeface="Calibri" pitchFamily="34" charset="0"/>
-                <a:ea typeface="Calibri" pitchFamily="34" charset="-122"/>
-                <a:cs typeface="Calibri" pitchFamily="34" charset="-120"/>
-              </a:rPr>
-              <a:t>The acceptance gate is AUROC ≤ 0.65. No checkpoint the project has ever produced comes close.</a:t>
-            </a:r>
-            <a:endParaRPr lang="en-US" sz="1150" dirty="0"/>
-          </a:p>
-        </p:txBody>
-      </p:sp>
-      <p:sp>
-        <p:nvSpPr>
-          <p:cNvPr id="19" name="Text 16"/>
-          <p:cNvSpPr/>
-          <p:nvPr/>
-        </p:nvSpPr>
-        <p:spPr>
-          <a:xfrm>
-            <a:off x="502920" y="6355080"/>
-            <a:ext cx="11155680" cy="292608"/>
-          </a:xfrm>
-          <a:prstGeom prst="rect">
-            <a:avLst/>
-          </a:prstGeom>
-          <a:noFill/>
-          <a:ln/>
-        </p:spPr>
-        <p:txBody>
-          <a:bodyPr wrap="square" lIns="0" tIns="0" rIns="0" bIns="0" rtlCol="0" anchor="ctr"/>
-          <a:lstStyle/>
-          <a:p>
-            <a:pPr indent="0" marL="0">
-              <a:buNone/>
-            </a:pPr>
-            <a:r>
-              <a:rPr lang="en-US" sz="1000" i="1" dirty="0">
-                <a:solidFill>
-                  <a:srgbClr val="6B7A90"/>
-                </a:solidFill>
-                <a:latin typeface="Calibri" pitchFamily="34" charset="0"/>
-                <a:ea typeface="Calibri" pitchFamily="34" charset="-122"/>
-                <a:cs typeface="Calibri" pitchFamily="34" charset="-120"/>
-              </a:rPr>
-              <a:t>The condition-only control sits exactly at chance, so the separation comes from the calorimeter deposits and not from mismatched incident conditions.</a:t>
-            </a:r>
-            <a:endParaRPr lang="en-US" sz="1000" dirty="0"/>
+              <a:t>The 100–125 GeV bin sits near +0.40 mean response bias for 25 consecutive epochs, far outside the ±0.05 band, and does not improve as the loss falls. Most other bins stay inside or near the band.</a:t>
+            </a:r>
+            <a:endParaRPr lang="en-US" sz="1300" dirty="0"/>
           </a:p>
         </p:txBody>
       </p:sp>
@@ -7411,7 +8764,7 @@
                 <a:ea typeface="Cambria" pitchFamily="34" charset="-122"/>
                 <a:cs typeface="Cambria" pitchFamily="34" charset="-120"/>
               </a:rPr>
-              <a:t>Same incident neutron, five stochastic Fast-MC showers</a:t>
+              <a:t>Can a classifier still tell the two generators apart?</a:t>
             </a:r>
             <a:endParaRPr lang="en-US" sz="3000" dirty="0"/>
           </a:p>
@@ -7450,7 +8803,7 @@
                 <a:ea typeface="Calibri" pitchFamily="34" charset="-122"/>
                 <a:cs typeface="Calibri" pitchFamily="34" charset="-120"/>
               </a:rPr>
-              <a:t>Longitudinal energy profile for one fixed validation condition, per family. The Geant4 reference is identical in every panel.</a:t>
+              <a:t>Yes — and this is the single most important negative result in the project.</a:t>
             </a:r>
             <a:endParaRPr lang="en-US" sz="1300" dirty="0"/>
           </a:p>
@@ -7458,7 +8811,7 @@
       </p:sp>
       <p:pic>
         <p:nvPicPr>
-          <p:cNvPr id="6" name="Image 0" descr="C:\Users\Julia\Desktop\coding\ASIoP\Fast MC CBSC\exhibition\current\model\10_same_condition_longitudinal_profiles.png">    </p:cNvPr>
+          <p:cNvPr id="6" name="Image 0" descr="C:\Users\Julia\Desktop\coding\ASIoP\Fast MC CBSC\exhibition\current\external_metrics\current_auroc_seed_spread.png">    </p:cNvPr>
           <p:cNvPicPr>
             <a:picLocks noChangeAspect="1"/>
           </p:cNvPicPr>
@@ -7472,8 +8825,8 @@
         </p:blipFill>
         <p:spPr>
           <a:xfrm>
-            <a:off x="1973502" y="1243584"/>
-            <a:ext cx="8305956" cy="4846320"/>
+            <a:off x="502920" y="1294892"/>
+            <a:ext cx="6675120" cy="3856736"/>
           </a:xfrm>
           <a:prstGeom prst="rect">
             <a:avLst/>
@@ -7483,6 +8836,426 @@
       <p:sp>
         <p:nvSpPr>
           <p:cNvPr id="7" name="Text 4"/>
+          <p:cNvSpPr/>
+          <p:nvPr/>
+        </p:nvSpPr>
+        <p:spPr>
+          <a:xfrm>
+            <a:off x="7452360" y="1298448"/>
+            <a:ext cx="4297680" cy="274320"/>
+          </a:xfrm>
+          <a:prstGeom prst="rect">
+            <a:avLst/>
+          </a:prstGeom>
+          <a:noFill/>
+          <a:ln/>
+        </p:spPr>
+        <p:txBody>
+          <a:bodyPr wrap="square" lIns="0" tIns="0" rIns="0" bIns="0" rtlCol="0" anchor="ctr"/>
+          <a:lstStyle/>
+          <a:p>
+            <a:pPr indent="0" marL="0">
+              <a:buNone/>
+            </a:pPr>
+            <a:r>
+              <a:rPr lang="en-US" sz="1200" b="1" dirty="0">
+                <a:solidFill>
+                  <a:srgbClr val="9B4F9B"/>
+                </a:solidFill>
+                <a:latin typeface="Calibri" pitchFamily="34" charset="0"/>
+                <a:ea typeface="Calibri" pitchFamily="34" charset="-122"/>
+                <a:cs typeface="Calibri" pitchFamily="34" charset="-120"/>
+              </a:rPr>
+              <a:t>Today, epoch 38</a:t>
+            </a:r>
+            <a:endParaRPr lang="en-US" sz="1200" dirty="0"/>
+          </a:p>
+        </p:txBody>
+      </p:sp>
+      <p:sp>
+        <p:nvSpPr>
+          <p:cNvPr id="8" name="Shape 5"/>
+          <p:cNvSpPr/>
+          <p:nvPr/>
+        </p:nvSpPr>
+        <p:spPr>
+          <a:xfrm>
+            <a:off x="7452360" y="1645920"/>
+            <a:ext cx="4297680" cy="713232"/>
+          </a:xfrm>
+          <a:prstGeom prst="roundRect">
+            <a:avLst>
+              <a:gd name="adj" fmla="val 6410"/>
+            </a:avLst>
+          </a:prstGeom>
+          <a:solidFill>
+            <a:srgbClr val="F4F6FA"/>
+          </a:solidFill>
+          <a:ln w="12700">
+            <a:solidFill>
+              <a:srgbClr val="F4F6FA"/>
+            </a:solidFill>
+            <a:prstDash val="solid"/>
+          </a:ln>
+        </p:spPr>
+      </p:sp>
+      <p:sp>
+        <p:nvSpPr>
+          <p:cNvPr id="9" name="Text 6"/>
+          <p:cNvSpPr/>
+          <p:nvPr/>
+        </p:nvSpPr>
+        <p:spPr>
+          <a:xfrm>
+            <a:off x="7598664" y="1700784"/>
+            <a:ext cx="2743200" cy="603504"/>
+          </a:xfrm>
+          <a:prstGeom prst="rect">
+            <a:avLst/>
+          </a:prstGeom>
+          <a:noFill/>
+          <a:ln/>
+        </p:spPr>
+        <p:txBody>
+          <a:bodyPr wrap="square" lIns="0" tIns="0" rIns="0" bIns="0" rtlCol="0" anchor="ctr"/>
+          <a:lstStyle/>
+          <a:p>
+            <a:pPr indent="0" marL="0">
+              <a:buNone/>
+            </a:pPr>
+            <a:r>
+              <a:rPr lang="en-US" sz="1150" dirty="0">
+                <a:solidFill>
+                  <a:srgbClr val="2E4A6B"/>
+                </a:solidFill>
+                <a:latin typeface="Calibri" pitchFamily="34" charset="0"/>
+                <a:ea typeface="Calibri" pitchFamily="34" charset="-122"/>
+                <a:cs typeface="Calibri" pitchFamily="34" charset="-120"/>
+              </a:rPr>
+              <a:t>Low-level hybrid, 3 seeds</a:t>
+            </a:r>
+            <a:endParaRPr lang="en-US" sz="1150" dirty="0"/>
+          </a:p>
+        </p:txBody>
+      </p:sp>
+      <p:sp>
+        <p:nvSpPr>
+          <p:cNvPr id="10" name="Text 7"/>
+          <p:cNvSpPr/>
+          <p:nvPr/>
+        </p:nvSpPr>
+        <p:spPr>
+          <a:xfrm>
+            <a:off x="10104120" y="1700784"/>
+            <a:ext cx="1554480" cy="603504"/>
+          </a:xfrm>
+          <a:prstGeom prst="rect">
+            <a:avLst/>
+          </a:prstGeom>
+          <a:noFill/>
+          <a:ln/>
+        </p:spPr>
+        <p:txBody>
+          <a:bodyPr wrap="square" lIns="0" tIns="0" rIns="0" bIns="0" rtlCol="0" anchor="ctr"/>
+          <a:lstStyle/>
+          <a:p>
+            <a:pPr algn="r" indent="0" marL="0">
+              <a:buNone/>
+            </a:pPr>
+            <a:r>
+              <a:rPr lang="en-US" sz="1400" b="1" dirty="0">
+                <a:solidFill>
+                  <a:srgbClr val="9B4F9B"/>
+                </a:solidFill>
+                <a:latin typeface="Cambria" pitchFamily="34" charset="0"/>
+                <a:ea typeface="Cambria" pitchFamily="34" charset="-122"/>
+                <a:cs typeface="Cambria" pitchFamily="34" charset="-120"/>
+              </a:rPr>
+              <a:t>0.8727 ± 0.0117</a:t>
+            </a:r>
+            <a:endParaRPr lang="en-US" sz="1400" dirty="0"/>
+          </a:p>
+        </p:txBody>
+      </p:sp>
+      <p:sp>
+        <p:nvSpPr>
+          <p:cNvPr id="11" name="Shape 8"/>
+          <p:cNvSpPr/>
+          <p:nvPr/>
+        </p:nvSpPr>
+        <p:spPr>
+          <a:xfrm>
+            <a:off x="7452360" y="2468880"/>
+            <a:ext cx="4297680" cy="713232"/>
+          </a:xfrm>
+          <a:prstGeom prst="roundRect">
+            <a:avLst>
+              <a:gd name="adj" fmla="val 6410"/>
+            </a:avLst>
+          </a:prstGeom>
+          <a:solidFill>
+            <a:srgbClr val="F4F6FA"/>
+          </a:solidFill>
+          <a:ln w="12700">
+            <a:solidFill>
+              <a:srgbClr val="F4F6FA"/>
+            </a:solidFill>
+            <a:prstDash val="solid"/>
+          </a:ln>
+        </p:spPr>
+      </p:sp>
+      <p:sp>
+        <p:nvSpPr>
+          <p:cNvPr id="12" name="Text 9"/>
+          <p:cNvSpPr/>
+          <p:nvPr/>
+        </p:nvSpPr>
+        <p:spPr>
+          <a:xfrm>
+            <a:off x="7598664" y="2523744"/>
+            <a:ext cx="2743200" cy="603504"/>
+          </a:xfrm>
+          <a:prstGeom prst="rect">
+            <a:avLst/>
+          </a:prstGeom>
+          <a:noFill/>
+          <a:ln/>
+        </p:spPr>
+        <p:txBody>
+          <a:bodyPr wrap="square" lIns="0" tIns="0" rIns="0" bIns="0" rtlCol="0" anchor="ctr"/>
+          <a:lstStyle/>
+          <a:p>
+            <a:pPr indent="0" marL="0">
+              <a:buNone/>
+            </a:pPr>
+            <a:r>
+              <a:rPr lang="en-US" sz="1150" dirty="0">
+                <a:solidFill>
+                  <a:srgbClr val="2E4A6B"/>
+                </a:solidFill>
+                <a:latin typeface="Calibri" pitchFamily="34" charset="0"/>
+                <a:ea typeface="Calibri" pitchFamily="34" charset="-122"/>
+                <a:cs typeface="Calibri" pitchFamily="34" charset="-120"/>
+              </a:rPr>
+              <a:t>High-level GBM control</a:t>
+            </a:r>
+            <a:endParaRPr lang="en-US" sz="1150" dirty="0"/>
+          </a:p>
+        </p:txBody>
+      </p:sp>
+      <p:sp>
+        <p:nvSpPr>
+          <p:cNvPr id="13" name="Text 10"/>
+          <p:cNvSpPr/>
+          <p:nvPr/>
+        </p:nvSpPr>
+        <p:spPr>
+          <a:xfrm>
+            <a:off x="10104120" y="2523744"/>
+            <a:ext cx="1554480" cy="603504"/>
+          </a:xfrm>
+          <a:prstGeom prst="rect">
+            <a:avLst/>
+          </a:prstGeom>
+          <a:noFill/>
+          <a:ln/>
+        </p:spPr>
+        <p:txBody>
+          <a:bodyPr wrap="square" lIns="0" tIns="0" rIns="0" bIns="0" rtlCol="0" anchor="ctr"/>
+          <a:lstStyle/>
+          <a:p>
+            <a:pPr algn="r" indent="0" marL="0">
+              <a:buNone/>
+            </a:pPr>
+            <a:r>
+              <a:rPr lang="en-US" sz="1400" b="1" dirty="0">
+                <a:solidFill>
+                  <a:srgbClr val="2E4A6B"/>
+                </a:solidFill>
+                <a:latin typeface="Cambria" pitchFamily="34" charset="0"/>
+                <a:ea typeface="Cambria" pitchFamily="34" charset="-122"/>
+                <a:cs typeface="Cambria" pitchFamily="34" charset="-120"/>
+              </a:rPr>
+              <a:t>0.9291</a:t>
+            </a:r>
+            <a:endParaRPr lang="en-US" sz="1400" dirty="0"/>
+          </a:p>
+        </p:txBody>
+      </p:sp>
+      <p:sp>
+        <p:nvSpPr>
+          <p:cNvPr id="14" name="Shape 11"/>
+          <p:cNvSpPr/>
+          <p:nvPr/>
+        </p:nvSpPr>
+        <p:spPr>
+          <a:xfrm>
+            <a:off x="7452360" y="3291840"/>
+            <a:ext cx="4297680" cy="713232"/>
+          </a:xfrm>
+          <a:prstGeom prst="roundRect">
+            <a:avLst>
+              <a:gd name="adj" fmla="val 6410"/>
+            </a:avLst>
+          </a:prstGeom>
+          <a:solidFill>
+            <a:srgbClr val="F4F6FA"/>
+          </a:solidFill>
+          <a:ln w="12700">
+            <a:solidFill>
+              <a:srgbClr val="F4F6FA"/>
+            </a:solidFill>
+            <a:prstDash val="solid"/>
+          </a:ln>
+        </p:spPr>
+      </p:sp>
+      <p:sp>
+        <p:nvSpPr>
+          <p:cNvPr id="15" name="Text 12"/>
+          <p:cNvSpPr/>
+          <p:nvPr/>
+        </p:nvSpPr>
+        <p:spPr>
+          <a:xfrm>
+            <a:off x="7598664" y="3346704"/>
+            <a:ext cx="2743200" cy="603504"/>
+          </a:xfrm>
+          <a:prstGeom prst="rect">
+            <a:avLst/>
+          </a:prstGeom>
+          <a:noFill/>
+          <a:ln/>
+        </p:spPr>
+        <p:txBody>
+          <a:bodyPr wrap="square" lIns="0" tIns="0" rIns="0" bIns="0" rtlCol="0" anchor="ctr"/>
+          <a:lstStyle/>
+          <a:p>
+            <a:pPr indent="0" marL="0">
+              <a:buNone/>
+            </a:pPr>
+            <a:r>
+              <a:rPr lang="en-US" sz="1150" dirty="0">
+                <a:solidFill>
+                  <a:srgbClr val="2E4A6B"/>
+                </a:solidFill>
+                <a:latin typeface="Calibri" pitchFamily="34" charset="0"/>
+                <a:ea typeface="Calibri" pitchFamily="34" charset="-122"/>
+                <a:cs typeface="Calibri" pitchFamily="34" charset="-120"/>
+              </a:rPr>
+              <a:t>Condition-only control</a:t>
+            </a:r>
+            <a:endParaRPr lang="en-US" sz="1150" dirty="0"/>
+          </a:p>
+        </p:txBody>
+      </p:sp>
+      <p:sp>
+        <p:nvSpPr>
+          <p:cNvPr id="16" name="Text 13"/>
+          <p:cNvSpPr/>
+          <p:nvPr/>
+        </p:nvSpPr>
+        <p:spPr>
+          <a:xfrm>
+            <a:off x="10104120" y="3346704"/>
+            <a:ext cx="1554480" cy="603504"/>
+          </a:xfrm>
+          <a:prstGeom prst="rect">
+            <a:avLst/>
+          </a:prstGeom>
+          <a:noFill/>
+          <a:ln/>
+        </p:spPr>
+        <p:txBody>
+          <a:bodyPr wrap="square" lIns="0" tIns="0" rIns="0" bIns="0" rtlCol="0" anchor="ctr"/>
+          <a:lstStyle/>
+          <a:p>
+            <a:pPr algn="r" indent="0" marL="0">
+              <a:buNone/>
+            </a:pPr>
+            <a:r>
+              <a:rPr lang="en-US" sz="1400" b="1" dirty="0">
+                <a:solidFill>
+                  <a:srgbClr val="6B7A90"/>
+                </a:solidFill>
+                <a:latin typeface="Cambria" pitchFamily="34" charset="0"/>
+                <a:ea typeface="Cambria" pitchFamily="34" charset="-122"/>
+                <a:cs typeface="Cambria" pitchFamily="34" charset="-120"/>
+              </a:rPr>
+              <a:t>0.5000  (p = 1.0)</a:t>
+            </a:r>
+            <a:endParaRPr lang="en-US" sz="1400" dirty="0"/>
+          </a:p>
+        </p:txBody>
+      </p:sp>
+      <p:sp>
+        <p:nvSpPr>
+          <p:cNvPr id="17" name="Shape 14"/>
+          <p:cNvSpPr/>
+          <p:nvPr/>
+        </p:nvSpPr>
+        <p:spPr>
+          <a:xfrm>
+            <a:off x="7452360" y="4206240"/>
+            <a:ext cx="4297680" cy="960120"/>
+          </a:xfrm>
+          <a:prstGeom prst="roundRect">
+            <a:avLst>
+              <a:gd name="adj" fmla="val 4762"/>
+            </a:avLst>
+          </a:prstGeom>
+          <a:solidFill>
+            <a:srgbClr val="FBE9E9"/>
+          </a:solidFill>
+          <a:ln w="12700">
+            <a:solidFill>
+              <a:srgbClr val="FBE9E9"/>
+            </a:solidFill>
+            <a:prstDash val="solid"/>
+          </a:ln>
+        </p:spPr>
+      </p:sp>
+      <p:sp>
+        <p:nvSpPr>
+          <p:cNvPr id="18" name="Text 15"/>
+          <p:cNvSpPr/>
+          <p:nvPr/>
+        </p:nvSpPr>
+        <p:spPr>
+          <a:xfrm>
+            <a:off x="7616952" y="4315968"/>
+            <a:ext cx="3977640" cy="749808"/>
+          </a:xfrm>
+          <a:prstGeom prst="rect">
+            <a:avLst/>
+          </a:prstGeom>
+          <a:noFill/>
+          <a:ln/>
+        </p:spPr>
+        <p:txBody>
+          <a:bodyPr wrap="square" lIns="0" tIns="0" rIns="0" bIns="0" rtlCol="0" anchor="ctr"/>
+          <a:lstStyle/>
+          <a:p>
+            <a:pPr indent="0" marL="0">
+              <a:buNone/>
+            </a:pPr>
+            <a:r>
+              <a:rPr lang="en-US" sz="1150" b="1" dirty="0">
+                <a:solidFill>
+                  <a:srgbClr val="8C2F2F"/>
+                </a:solidFill>
+                <a:latin typeface="Calibri" pitchFamily="34" charset="0"/>
+                <a:ea typeface="Calibri" pitchFamily="34" charset="-122"/>
+                <a:cs typeface="Calibri" pitchFamily="34" charset="-120"/>
+              </a:rPr>
+              <a:t>The acceptance gate is AUROC ≤ 0.65. No checkpoint the project has ever produced comes close.</a:t>
+            </a:r>
+            <a:endParaRPr lang="en-US" sz="1150" dirty="0"/>
+          </a:p>
+        </p:txBody>
+      </p:sp>
+      <p:sp>
+        <p:nvSpPr>
+          <p:cNvPr id="19" name="Text 16"/>
           <p:cNvSpPr/>
           <p:nvPr/>
         </p:nvSpPr>
@@ -7513,7 +9286,7 @@
                 <a:ea typeface="Calibri" pitchFamily="34" charset="-122"/>
                 <a:cs typeface="Calibri" pitchFamily="34" charset="-120"/>
               </a:rPr>
-              <a:t>One condition, illustrative rather than statistically representative. Note the ECAL layer-0 spike: Geant4 deposits ~10 GeV there and Fast-MC undershoots it by two orders of magnitude.</a:t>
+              <a:t>The condition-only control sits exactly at chance, so the separation comes from the calorimeter deposits and not from mismatched incident conditions.</a:t>
             </a:r>
             <a:endParaRPr lang="en-US" sz="1000" dirty="0"/>
           </a:p>
@@ -7643,7 +9416,7 @@
                 <a:ea typeface="Cambria" pitchFamily="34" charset="-122"/>
                 <a:cs typeface="Cambria" pitchFamily="34" charset="-120"/>
               </a:rPr>
-              <a:t>One Geant4 shower and five Fast-MC draws, same four-momentum</a:t>
+              <a:t>Separability does not depend on incident energy</a:t>
             </a:r>
             <a:endParaRPr lang="en-US" sz="3000" dirty="0"/>
           </a:p>
@@ -7682,7 +9455,7 @@
                 <a:ea typeface="Calibri" pitchFamily="34" charset="-122"/>
                 <a:cs typeface="Calibri" pitchFamily="34" charset="-120"/>
               </a:rPr>
-              <a:t>Lowest accepted-loss family · epoch 22 · K_inc = 133 GeV · top 1,000 cells by deposited energy per panel.</a:t>
+              <a:t>Monitoring-holdout AUROC per energy bin, accepted best checkpoint.</a:t>
             </a:r>
             <a:endParaRPr lang="en-US" sz="1300" dirty="0"/>
           </a:p>
@@ -7690,7 +9463,7 @@
       </p:sp>
       <p:pic>
         <p:nvPicPr>
-          <p:cNvPr id="6" name="Image 0" descr="C:\Users\Julia\Desktop\coding\ASIoP\Fast MC CBSC\exhibition\current\model\12_same_condition_3d_energy_deposits.png">    </p:cNvPr>
+          <p:cNvPr id="6" name="Image 0" descr="C:\Users\Julia\Desktop\coding\ASIoP\Fast MC CBSC\exhibition\current\external_metrics\current_auroc_vs_energy.png">    </p:cNvPr>
           <p:cNvPicPr>
             <a:picLocks noChangeAspect="1"/>
           </p:cNvPicPr>
@@ -7704,8 +9477,8 @@
         </p:blipFill>
         <p:spPr>
           <a:xfrm>
-            <a:off x="1800167" y="1243584"/>
-            <a:ext cx="8652627" cy="4846320"/>
+            <a:off x="2458489" y="1280160"/>
+            <a:ext cx="7244542" cy="3794760"/>
           </a:xfrm>
           <a:prstGeom prst="rect">
             <a:avLst/>
@@ -7714,40 +9487,316 @@
       </p:pic>
       <p:sp>
         <p:nvSpPr>
-          <p:cNvPr id="7" name="Text 4"/>
-          <p:cNvSpPr/>
-          <p:nvPr/>
-        </p:nvSpPr>
-        <p:spPr>
-          <a:xfrm>
-            <a:off x="502920" y="6355080"/>
-            <a:ext cx="11155680" cy="292608"/>
-          </a:xfrm>
-          <a:prstGeom prst="rect">
-            <a:avLst/>
-          </a:prstGeom>
-          <a:noFill/>
-          <a:ln/>
-        </p:spPr>
-        <p:txBody>
-          <a:bodyPr wrap="square" lIns="0" tIns="0" rIns="0" bIns="0" rtlCol="0" anchor="ctr"/>
-          <a:lstStyle/>
-          <a:p>
-            <a:pPr indent="0" marL="0">
-              <a:buNone/>
-            </a:pPr>
-            <a:r>
-              <a:rPr lang="en-US" sz="1000" i="1" dirty="0">
+          <p:cNvPr id="7" name="Shape 4"/>
+          <p:cNvSpPr/>
+          <p:nvPr/>
+        </p:nvSpPr>
+        <p:spPr>
+          <a:xfrm>
+            <a:off x="1463040" y="5230368"/>
+            <a:ext cx="2926080" cy="1207008"/>
+          </a:xfrm>
+          <a:prstGeom prst="roundRect">
+            <a:avLst>
+              <a:gd name="adj" fmla="val 4545"/>
+            </a:avLst>
+          </a:prstGeom>
+          <a:solidFill>
+            <a:srgbClr val="F4F6FA"/>
+          </a:solidFill>
+          <a:ln w="12700">
+            <a:solidFill>
+              <a:srgbClr val="F4F6FA"/>
+            </a:solidFill>
+            <a:prstDash val="solid"/>
+          </a:ln>
+        </p:spPr>
+      </p:sp>
+      <p:sp>
+        <p:nvSpPr>
+          <p:cNvPr id="8" name="Text 5"/>
+          <p:cNvSpPr/>
+          <p:nvPr/>
+        </p:nvSpPr>
+        <p:spPr>
+          <a:xfrm>
+            <a:off x="1572768" y="5349240"/>
+            <a:ext cx="2706624" cy="566928"/>
+          </a:xfrm>
+          <a:prstGeom prst="rect">
+            <a:avLst/>
+          </a:prstGeom>
+          <a:noFill/>
+          <a:ln/>
+        </p:spPr>
+        <p:txBody>
+          <a:bodyPr wrap="square" lIns="0" tIns="0" rIns="0" bIns="0" rtlCol="0" anchor="ctr"/>
+          <a:lstStyle/>
+          <a:p>
+            <a:pPr algn="ctr" indent="0" marL="0">
+              <a:buNone/>
+            </a:pPr>
+            <a:r>
+              <a:rPr lang="en-US" sz="2700" b="1" dirty="0">
+                <a:solidFill>
+                  <a:srgbClr val="9B4F9B"/>
+                </a:solidFill>
+                <a:latin typeface="Cambria" pitchFamily="34" charset="0"/>
+                <a:ea typeface="Cambria" pitchFamily="34" charset="-122"/>
+                <a:cs typeface="Cambria" pitchFamily="34" charset="-120"/>
+              </a:rPr>
+              <a:t>0.82 – 0.93</a:t>
+            </a:r>
+            <a:endParaRPr lang="en-US" sz="2700" dirty="0"/>
+          </a:p>
+        </p:txBody>
+      </p:sp>
+      <p:sp>
+        <p:nvSpPr>
+          <p:cNvPr id="9" name="Text 6"/>
+          <p:cNvSpPr/>
+          <p:nvPr/>
+        </p:nvSpPr>
+        <p:spPr>
+          <a:xfrm>
+            <a:off x="1554480" y="5925312"/>
+            <a:ext cx="2743200" cy="420624"/>
+          </a:xfrm>
+          <a:prstGeom prst="rect">
+            <a:avLst/>
+          </a:prstGeom>
+          <a:noFill/>
+          <a:ln/>
+        </p:spPr>
+        <p:txBody>
+          <a:bodyPr wrap="square" lIns="0" tIns="0" rIns="0" bIns="0" rtlCol="0" anchor="ctr"/>
+          <a:lstStyle/>
+          <a:p>
+            <a:pPr algn="ctr" indent="0" marL="0">
+              <a:buNone/>
+            </a:pPr>
+            <a:r>
+              <a:rPr lang="en-US" sz="1050" dirty="0">
+                <a:solidFill>
+                  <a:srgbClr val="2E4A6B"/>
+                </a:solidFill>
+                <a:latin typeface="Calibri" pitchFamily="34" charset="0"/>
+                <a:ea typeface="Calibri" pitchFamily="34" charset="-122"/>
+                <a:cs typeface="Calibri" pitchFamily="34" charset="-120"/>
+              </a:rPr>
+              <a:t>AUROC across every energy bin</a:t>
+            </a:r>
+            <a:endParaRPr lang="en-US" sz="1050" dirty="0"/>
+          </a:p>
+        </p:txBody>
+      </p:sp>
+      <p:sp>
+        <p:nvSpPr>
+          <p:cNvPr id="10" name="Shape 7"/>
+          <p:cNvSpPr/>
+          <p:nvPr/>
+        </p:nvSpPr>
+        <p:spPr>
+          <a:xfrm>
+            <a:off x="4617720" y="5230368"/>
+            <a:ext cx="2926080" cy="1207008"/>
+          </a:xfrm>
+          <a:prstGeom prst="roundRect">
+            <a:avLst>
+              <a:gd name="adj" fmla="val 4545"/>
+            </a:avLst>
+          </a:prstGeom>
+          <a:solidFill>
+            <a:srgbClr val="F4F6FA"/>
+          </a:solidFill>
+          <a:ln w="12700">
+            <a:solidFill>
+              <a:srgbClr val="F4F6FA"/>
+            </a:solidFill>
+            <a:prstDash val="solid"/>
+          </a:ln>
+        </p:spPr>
+      </p:sp>
+      <p:sp>
+        <p:nvSpPr>
+          <p:cNvPr id="11" name="Text 8"/>
+          <p:cNvSpPr/>
+          <p:nvPr/>
+        </p:nvSpPr>
+        <p:spPr>
+          <a:xfrm>
+            <a:off x="4727448" y="5349240"/>
+            <a:ext cx="2706624" cy="566928"/>
+          </a:xfrm>
+          <a:prstGeom prst="rect">
+            <a:avLst/>
+          </a:prstGeom>
+          <a:noFill/>
+          <a:ln/>
+        </p:spPr>
+        <p:txBody>
+          <a:bodyPr wrap="square" lIns="0" tIns="0" rIns="0" bIns="0" rtlCol="0" anchor="ctr"/>
+          <a:lstStyle/>
+          <a:p>
+            <a:pPr algn="ctr" indent="0" marL="0">
+              <a:buNone/>
+            </a:pPr>
+            <a:r>
+              <a:rPr lang="en-US" sz="2700" b="1" dirty="0">
+                <a:solidFill>
+                  <a:srgbClr val="8C2F2F"/>
+                </a:solidFill>
+                <a:latin typeface="Cambria" pitchFamily="34" charset="0"/>
+                <a:ea typeface="Cambria" pitchFamily="34" charset="-122"/>
+                <a:cs typeface="Cambria" pitchFamily="34" charset="-120"/>
+              </a:rPr>
+              <a:t>0.65</a:t>
+            </a:r>
+            <a:endParaRPr lang="en-US" sz="2700" dirty="0"/>
+          </a:p>
+        </p:txBody>
+      </p:sp>
+      <p:sp>
+        <p:nvSpPr>
+          <p:cNvPr id="12" name="Text 9"/>
+          <p:cNvSpPr/>
+          <p:nvPr/>
+        </p:nvSpPr>
+        <p:spPr>
+          <a:xfrm>
+            <a:off x="4709160" y="5925312"/>
+            <a:ext cx="2743200" cy="420624"/>
+          </a:xfrm>
+          <a:prstGeom prst="rect">
+            <a:avLst/>
+          </a:prstGeom>
+          <a:noFill/>
+          <a:ln/>
+        </p:spPr>
+        <p:txBody>
+          <a:bodyPr wrap="square" lIns="0" tIns="0" rIns="0" bIns="0" rtlCol="0" anchor="ctr"/>
+          <a:lstStyle/>
+          <a:p>
+            <a:pPr algn="ctr" indent="0" marL="0">
+              <a:buNone/>
+            </a:pPr>
+            <a:r>
+              <a:rPr lang="en-US" sz="1050" dirty="0">
+                <a:solidFill>
+                  <a:srgbClr val="2E4A6B"/>
+                </a:solidFill>
+                <a:latin typeface="Calibri" pitchFamily="34" charset="0"/>
+                <a:ea typeface="Calibri" pitchFamily="34" charset="-122"/>
+                <a:cs typeface="Calibri" pitchFamily="34" charset="-120"/>
+              </a:rPr>
+              <a:t>acceptance gate, never reached</a:t>
+            </a:r>
+            <a:endParaRPr lang="en-US" sz="1050" dirty="0"/>
+          </a:p>
+        </p:txBody>
+      </p:sp>
+      <p:sp>
+        <p:nvSpPr>
+          <p:cNvPr id="13" name="Shape 10"/>
+          <p:cNvSpPr/>
+          <p:nvPr/>
+        </p:nvSpPr>
+        <p:spPr>
+          <a:xfrm>
+            <a:off x="7772400" y="5230368"/>
+            <a:ext cx="2926080" cy="1207008"/>
+          </a:xfrm>
+          <a:prstGeom prst="roundRect">
+            <a:avLst>
+              <a:gd name="adj" fmla="val 4545"/>
+            </a:avLst>
+          </a:prstGeom>
+          <a:solidFill>
+            <a:srgbClr val="F4F6FA"/>
+          </a:solidFill>
+          <a:ln w="12700">
+            <a:solidFill>
+              <a:srgbClr val="F4F6FA"/>
+            </a:solidFill>
+            <a:prstDash val="solid"/>
+          </a:ln>
+        </p:spPr>
+      </p:sp>
+      <p:sp>
+        <p:nvSpPr>
+          <p:cNvPr id="14" name="Text 11"/>
+          <p:cNvSpPr/>
+          <p:nvPr/>
+        </p:nvSpPr>
+        <p:spPr>
+          <a:xfrm>
+            <a:off x="7882128" y="5349240"/>
+            <a:ext cx="2706624" cy="566928"/>
+          </a:xfrm>
+          <a:prstGeom prst="rect">
+            <a:avLst/>
+          </a:prstGeom>
+          <a:noFill/>
+          <a:ln/>
+        </p:spPr>
+        <p:txBody>
+          <a:bodyPr wrap="square" lIns="0" tIns="0" rIns="0" bIns="0" rtlCol="0" anchor="ctr"/>
+          <a:lstStyle/>
+          <a:p>
+            <a:pPr algn="ctr" indent="0" marL="0">
+              <a:buNone/>
+            </a:pPr>
+            <a:r>
+              <a:rPr lang="en-US" sz="2700" b="1" dirty="0">
                 <a:solidFill>
                   <a:srgbClr val="6B7A90"/>
                 </a:solidFill>
-                <a:latin typeface="Calibri" pitchFamily="34" charset="0"/>
-                <a:ea typeface="Calibri" pitchFamily="34" charset="-122"/>
-                <a:cs typeface="Calibri" pitchFamily="34" charset="-120"/>
-              </a:rPr>
-              <a:t>The five draws differ because the generator is stochastic. Plausible-looking events are not evidence of fidelity.</a:t>
-            </a:r>
-            <a:endParaRPr lang="en-US" sz="1000" dirty="0"/>
+                <a:latin typeface="Cambria" pitchFamily="34" charset="0"/>
+                <a:ea typeface="Cambria" pitchFamily="34" charset="-122"/>
+                <a:cs typeface="Cambria" pitchFamily="34" charset="-120"/>
+              </a:rPr>
+              <a:t>0.50</a:t>
+            </a:r>
+            <a:endParaRPr lang="en-US" sz="2700" dirty="0"/>
+          </a:p>
+        </p:txBody>
+      </p:sp>
+      <p:sp>
+        <p:nvSpPr>
+          <p:cNvPr id="15" name="Text 12"/>
+          <p:cNvSpPr/>
+          <p:nvPr/>
+        </p:nvSpPr>
+        <p:spPr>
+          <a:xfrm>
+            <a:off x="7863840" y="5925312"/>
+            <a:ext cx="2743200" cy="420624"/>
+          </a:xfrm>
+          <a:prstGeom prst="rect">
+            <a:avLst/>
+          </a:prstGeom>
+          <a:noFill/>
+          <a:ln/>
+        </p:spPr>
+        <p:txBody>
+          <a:bodyPr wrap="square" lIns="0" tIns="0" rIns="0" bIns="0" rtlCol="0" anchor="ctr"/>
+          <a:lstStyle/>
+          <a:p>
+            <a:pPr algn="ctr" indent="0" marL="0">
+              <a:buNone/>
+            </a:pPr>
+            <a:r>
+              <a:rPr lang="en-US" sz="1050" dirty="0">
+                <a:solidFill>
+                  <a:srgbClr val="2E4A6B"/>
+                </a:solidFill>
+                <a:latin typeface="Calibri" pitchFamily="34" charset="0"/>
+                <a:ea typeface="Calibri" pitchFamily="34" charset="-122"/>
+                <a:cs typeface="Calibri" pitchFamily="34" charset="-120"/>
+              </a:rPr>
+              <a:t>chance, for reference</a:t>
+            </a:r>
+            <a:endParaRPr lang="en-US" sz="1050" dirty="0"/>
           </a:p>
         </p:txBody>
       </p:sp>
